--- a/it/slides/18-Architettura_dei_Calcolatori-Processore.pptx
+++ b/it/slides/18-Architettura_dei_Calcolatori-Processore.pptx
@@ -126,13 +126,13 @@
   <p:extLst>
     <p:ext uri="{521415D9-36F7-43E2-AB2F-B90AF26B5E84}">
       <p14:sectionLst xmlns:p14="http://schemas.microsoft.com/office/powerpoint/2010/main">
-        <p14:section name="Apertura" id="{4d283378-adca-0be1-8a08-1ac5239e8e30}">
+        <p14:section name="Apertura" id="{8e079a43-471c-120d-440f-110e692c6cfd}">
           <p14:sldIdLst>
             <p14:sldId id="256"/>
             <p14:sldId id="257"/>
           </p14:sldIdLst>
         </p14:section>
-        <p14:section name="Il processore" id="{710bfe4b-387a-85f3-4dba-228a989e8bf7}">
+        <p14:section name="Il processore" id="{c0e4d890-d7cd-b120-e22e-dd40c7b4db4e}">
           <p14:sldIdLst>
             <p14:sldId id="258"/>
             <p14:sldId id="259"/>
@@ -141,7 +141,7 @@
             <p14:sldId id="262"/>
           </p14:sldIdLst>
         </p14:section>
-        <p14:section name="I registri" id="{60c03969-2348-f61c-2287-682dba9ef88d}">
+        <p14:section name="I registri" id="{7ac6af43-f106-ef17-5938-ccb5db44c401}">
           <p14:sldIdLst>
             <p14:sldId id="263"/>
             <p14:sldId id="264"/>
@@ -149,18 +149,18 @@
             <p14:sldId id="266"/>
           </p14:sldIdLst>
         </p14:section>
-        <p14:section name="Lo stack" id="{32fd3db7-1cc8-fb29-1ba5-8fcf7e4028f7}">
+        <p14:section name="Lo stack" id="{da1f7438-0377-dc69-cc71-9c3ff52e28a5}">
           <p14:sldIdLst>
             <p14:sldId id="267"/>
           </p14:sldIdLst>
         </p14:section>
-        <p14:section name="Modelli di processore" id="{e77825dc-731f-7a4c-3aef-6755b4048267}">
+        <p14:section name="Modelli di processore" id="{50929f64-65cf-e892-7b41-7c1562e383a5}">
           <p14:sldIdLst>
             <p14:sldId id="268"/>
             <p14:sldId id="269"/>
           </p14:sldIdLst>
         </p14:section>
-        <p14:section name="La ALU e il quadro d'insieme" id="{c803dbd4-cac6-3c8f-ff4a-67b28c89b336}">
+        <p14:section name="La ALU e il quadro d'insieme" id="{611d68fe-0a08-3598-a382-012e54708a58}">
           <p14:sldIdLst>
             <p14:sldId id="270"/>
             <p14:sldId id="271"/>
@@ -3298,7 +3298,63 @@
       </p:sp>
       <p:sp>
         <p:nvSpPr>
-          <p:cNvPr id="12" name="Shape 10"/>
+          <p:cNvPr id="12" name="Text 10"/>
+          <p:cNvSpPr txBox="1"/>
+          <p:nvPr/>
+        </p:nvSpPr>
+        <p:spPr>
+          <a:xfrm>
+            <a:off x="4693615" y="566928"/>
+            <a:ext cx="6949440" cy="640080"/>
+          </a:xfrm>
+          <a:prstGeom prst="rect">
+            <a:avLst/>
+          </a:prstGeom>
+          <a:noFill/>
+          <a:ln/>
+        </p:spPr>
+        <p:txBody>
+          <a:bodyPr wrap="square" lIns="0" tIns="0" rIns="0" bIns="0" rtlCol="0" anchor="t"/>
+          <a:lstStyle/>
+          <a:p>
+            <a:pPr algn="r" indent="0" marL="0">
+              <a:buNone/>
+            </a:pPr>
+            <a:r>
+              <a:rPr lang="en-US" sz="1300" dirty="0">
+                <a:solidFill>
+                  <a:srgbClr val="CFE3EA"/>
+                </a:solidFill>
+                <a:latin typeface="Calibri" pitchFamily="34" charset="0"/>
+                <a:ea typeface="Calibri" pitchFamily="34" charset="-122"/>
+                <a:cs typeface="Calibri" pitchFamily="34" charset="-120"/>
+              </a:rPr>
+              <a:t>Presentazione della lezione. I listati, il programma completo e come provarlo sono nella presentazione del codice:</a:t>
+            </a:r>
+            <a:endParaRPr lang="en-US" sz="1300" dirty="0"/>
+          </a:p>
+          <a:p>
+            <a:pPr algn="r" indent="0" marL="0">
+              <a:buNone/>
+            </a:pPr>
+            <a:r>
+              <a:rPr lang="en-US" sz="1300" dirty="0">
+                <a:solidFill>
+                  <a:srgbClr val="CFE3EA"/>
+                </a:solidFill>
+                <a:latin typeface="Calibri" pitchFamily="34" charset="0"/>
+                <a:ea typeface="Calibri" pitchFamily="34" charset="-122"/>
+                <a:cs typeface="Calibri" pitchFamily="34" charset="-120"/>
+              </a:rPr>
+              <a:t>18-Architettura_dei_Calcolatori-Processore-Codice.pptx</a:t>
+            </a:r>
+            <a:endParaRPr lang="en-US" sz="1300" dirty="0"/>
+          </a:p>
+        </p:txBody>
+      </p:sp>
+      <p:sp>
+        <p:nvSpPr>
+          <p:cNvPr id="13" name="Shape 11"/>
           <p:cNvSpPr/>
           <p:nvPr/>
         </p:nvSpPr>
@@ -3325,7 +3381,7 @@
       </p:sp>
       <p:pic>
         <p:nvPicPr>
-          <p:cNvPr id="13" name="Image 0" descr="/Users/raffaelemontella/devel/riscv-prg32/computer-architecture-with-prg32/tools/assets/prg32qt_debugger.png">    </p:cNvPr>
+          <p:cNvPr id="14" name="Image 0" descr="/Users/raffaelemontella/devel/riscv-prg32/computer-architecture-with-prg32/tools/assets/prg32qt_debugger.png">    </p:cNvPr>
           <p:cNvPicPr>
             <a:picLocks noChangeAspect="1"/>
           </p:cNvPicPr>

--- a/it/slides/18-Architettura_dei_Calcolatori-Processore.pptx
+++ b/it/slides/18-Architettura_dei_Calcolatori-Processore.pptx
@@ -126,13 +126,13 @@
   <p:extLst>
     <p:ext uri="{521415D9-36F7-43E2-AB2F-B90AF26B5E84}">
       <p14:sectionLst xmlns:p14="http://schemas.microsoft.com/office/powerpoint/2010/main">
-        <p14:section name="Apertura" id="{8e079a43-471c-120d-440f-110e692c6cfd}">
+        <p14:section name="Apertura" id="{256453c3-fc41-6076-c60b-203ac5f7e35e}">
           <p14:sldIdLst>
             <p14:sldId id="256"/>
             <p14:sldId id="257"/>
           </p14:sldIdLst>
         </p14:section>
-        <p14:section name="Il processore" id="{c0e4d890-d7cd-b120-e22e-dd40c7b4db4e}">
+        <p14:section name="Il processore" id="{08de94a7-7d7c-114b-d95e-7468da22a78a}">
           <p14:sldIdLst>
             <p14:sldId id="258"/>
             <p14:sldId id="259"/>
@@ -141,7 +141,7 @@
             <p14:sldId id="262"/>
           </p14:sldIdLst>
         </p14:section>
-        <p14:section name="I registri" id="{7ac6af43-f106-ef17-5938-ccb5db44c401}">
+        <p14:section name="I registri" id="{1f9eb142-fe38-de9f-cf9d-6b7d0ff1d895}">
           <p14:sldIdLst>
             <p14:sldId id="263"/>
             <p14:sldId id="264"/>
@@ -149,18 +149,18 @@
             <p14:sldId id="266"/>
           </p14:sldIdLst>
         </p14:section>
-        <p14:section name="Lo stack" id="{da1f7438-0377-dc69-cc71-9c3ff52e28a5}">
+        <p14:section name="Lo stack" id="{172fcf52-795b-95d1-2918-e31c83270353}">
           <p14:sldIdLst>
             <p14:sldId id="267"/>
           </p14:sldIdLst>
         </p14:section>
-        <p14:section name="Modelli di processore" id="{50929f64-65cf-e892-7b41-7c1562e383a5}">
+        <p14:section name="Modelli di processore" id="{f27ba2bf-eef6-0652-5573-7aec1151bc7f}">
           <p14:sldIdLst>
             <p14:sldId id="268"/>
             <p14:sldId id="269"/>
           </p14:sldIdLst>
         </p14:section>
-        <p14:section name="La ALU e il quadro d'insieme" id="{611d68fe-0a08-3598-a382-012e54708a58}">
+        <p14:section name="La ALU e il quadro d'insieme" id="{6da9939b-d1a8-029d-bcbc-da1838cd1bf3}">
           <p14:sldIdLst>
             <p14:sldId id="270"/>
             <p14:sldId id="271"/>
@@ -575,6 +575,8 @@
             <a:r>
               <a:rPr lang="en-US" dirty="0"/>
               <a:t>L'ultimo blocco del corso apre la macchina che finora ha eseguito i vostri programmi. Questa lezione presenta il processore due volte: prima come modello generale, valido per ogni processore, con unità di controllo, registri, stack e unità aritmetica; poi come RISC-V, il processore che programmate dai primi giorni. Ogni elemento astratto del modello ha già, per voi, un nome familiare. L'anello della citazione è il processore stesso: l'unico componente che comanda tutti gli altri.
+Stato di apprendimento: DA COMPRENDERE OGGI, alla fine di questa lezione lo spiegate, lo seguite passo passo e lo applicate da soli; DA UTILIZZARE OGGI, oggi seguite e usate la ricetta; come funziona dentro si spiega più avanti, o non fa parte del corso; DA COMPRENDERE PIÙ AVANTI, riconoscete il nome e lo scopo; lo spiega una lezione successiva. Una slide senza etichetta è contesto: una storia, un esempio, una domanda, un esercizio.
+Stato di apprendimento di questa lezione. DA COMPRENDERE OGGI: accumulatore, pila, registri; il modello del processore; i registri di RISC-V; la convenzione di chiamata; la pila; il processore RV32. DA UTILIZZARE OGGI: il programma completo, gli strumenti di PRG32 (si usa, non si studia, in questo corso). DA COMPRENDERE PIÙ AVANTI: interruzioni e trap (Lezione 19). Una slide senza etichetta è contesto: una storia, un esempio, una domanda, un esercizio.
 Per il docente: La presentazione originale esponeva un modello generale di processore e finiva con l'architettura del Motorola MC68000. Qui il modello generale resta e il riferimento è RISC-V (RV32IMAC, come sull'ESP32-C6 del kit PRG32): gli studenti lo programmano dai primi giorni, quindi ogni elemento astratto ha un nome che conoscono già.</a:t>
             </a:r>
             <a:endParaRPr lang="en-US" dirty="0"/>
@@ -664,6 +666,7 @@
             <a:r>
               <a:rPr lang="en-US" dirty="0"/>
               <a:t>Molti processori hanno un registro di stato i cui bit, i flag, registrano l'esito dell'ultima operazione: zero, negativo, overflow, riporto. Un'istruzione li imposta, e un salto condizionato successivo li esamina. RISC-V non ne ha. Un salto confronta due registri e salta, tutto in una sola istruzione; slt scrive il risultato di un confronto in un registro ordinario; riporto e overflow si calcolano quando servono, come nella Lezione 05. Meno stato nascosto significa un processore più semplice e interruzioni più semplici.
+DA COMPRENDERE OGGI: i registri di RISC-V.
 Per il docente: Registro di stato. La presentazione originale elencava Z, N, P (positivo), V, C e un bit di parità.</a:t>
             </a:r>
             <a:endParaRPr lang="en-US" dirty="0"/>
@@ -753,6 +756,7 @@
             <a:r>
               <a:rPr lang="en-US" dirty="0"/>
               <a:t>I registri speciali di RISC-V sono i registri di controllo e stato, CSR: un banco separato, letto e scritto solo da codice privilegiato con istruzioni dedicate. Cinque vanno conosciuti per nome: mstatus, con l'abilitazione globale delle interruzioni; mtvec, l'indirizzo della routine che gestisce le trap; mepc, l'indirizzo dell'istruzione interrotta; mcause, la ragione della trap; e la coppia mie e mip, con un bit per sorgente di interruzione. La prossima lezione li usa tutti.
+DA COMPRENDERE OGGI: i registri di RISC-V. DA COMPRENDERE PIÙ AVANTI: interruzioni e trap (si studia nella Lezione 19).
 Per il docente: Registri di controllo e stato: un banco separato di al più 4096 registri, letti e scritti solo con le istruzioni csrrw, csrrs e csrrc, e solo da codice privilegiato. Sono i «registri delle interruzioni» del modello generale, e l'argomento della Lezione 19.</a:t>
             </a:r>
             <a:endParaRPr lang="en-US" dirty="0"/>
@@ -842,6 +846,7 @@
             <a:r>
               <a:rPr lang="en-US" dirty="0"/>
               <a:t>Uno stack ha due operazioni: push memorizza un elemento in cima alla pila, pop toglie l'elemento in cima. Lavora sempre sulla cima, quindi non occorre dire dove: l'ultimo a entrare è il primo a uscire. Serve a mettere da parte il contenuto dei registri da liberare per un compito e a ripristinarlo dopo. Si realizza con un puntatore che indica l'ultimo elemento. I programmi accurati controllano l'overflow su un push e lo stack vuoto su un pop.
+DA COMPRENDERE OGGI: la pila; la convenzione di chiamata.
 Per il docente: LIFO, last in, first out. Lo usate dalla Lezione 02 per salvare ra.</a:t>
             </a:r>
             <a:endParaRPr lang="en-US" dirty="0"/>
@@ -931,6 +936,7 @@
             <a:r>
               <a:rPr lang="en-US" dirty="0"/>
               <a:t>Quattro architetture. Con i registri generici il processore ha un insieme di registri intercambiabili. Con un accumulatore, le istruzioni aritmetiche hanno un operando implicito, un registro speciale. In una macchina a stack non ci sono né gli uni né l'altro, solo un puntatore allo stack, e le istruzioni lavorano sulla cima dello stack. Un'architettura ortogonale ha un unico banco di registri generici, alcuni dei quali fanno anche da puntatore allo stack o svolgono altri ruoli speciali. RISC-V è di quest'ultimo tipo.
+DA COMPRENDERE OGGI: accumulatore, pila, registri.
 Per il docente: Modello a registri generici, ad accumulatore, a stack; architetture ortogonali. La definizione originale di ortogonale cita anche un registro di stato; RISC-V è ortogonale e non ha nemmeno quello.</a:t>
             </a:r>
             <a:endParaRPr lang="en-US" dirty="0"/>
@@ -1020,6 +1026,7 @@
             <a:r>
               <a:rPr lang="en-US" dirty="0"/>
               <a:t>RISC-V è un processore load-store a registri generici. Solo load e store toccano la memoria; ogni altra istruzione lavora da registro a registro, che è più veloce. Le istruzioni hanno tre operandi, due sorgenti e una destinazione, così nessun valore viene distrutto se non lo si vuole. Ogni istruzione fa una cosa semplice e ha dimensione fissa, il che la rende facile da decodificare e da eseguire in pipeline. È questo il significato di RISC. Le sette righe del riscaldamento sono il prezzo, e la semplicità di ogni riga è il guadagno.
+DA COMPRENDERE OGGI: accumulatore, pila, registri.
 Per il docente: Da registro a registro: [REGX] + [REGY] dà [REGZ]. Le forme da memoria a registro e da registro a memoria della presentazione originale esistono nei processori CISC e sono esattamente ciò a cui RISC rinuncia.</a:t>
             </a:r>
             <a:endParaRPr lang="en-US" dirty="0"/>
@@ -1109,6 +1116,7 @@
             <a:r>
               <a:rPr lang="en-US" dirty="0"/>
               <a:t>Lo schema a blocchi di un processore RV32, da sinistra a destra. Il PC dà l'indirizzo dell'istruzione. L'istruzione viene prelevata dalla memoria. Il decodificatore ne separa i campi e l'unità di controllo emette i comandi. Il banco dei registri fornisce gli operandi. La ALU calcola, oppure forma un indirizzo. La memoria dati viene letta o scritta da load e store. Due percorsi tornano indietro: il risultato torna nel registro indicato da rd, e il prossimo valore del PC è PC più 4 oppure la destinazione di un salto. Ogni istruzione che scrivete percorre questa strada.
+DA COMPRENDERE OGGI: il processore RV32.
 Per il docente: Il classico datapath RISC-V a ciclo singolo di Patterson e Hennessy, ridotto ai suoi blocchi; memoria istruzioni e memoria dati sono lo stesso spazio di indirizzi, disegnato due volte per chiarezza. Sostituisce la slide «Architettura del processore MC68000».</a:t>
             </a:r>
             <a:endParaRPr lang="en-US" dirty="0"/>
@@ -1198,6 +1206,7 @@
             <a:r>
               <a:rPr lang="en-US" dirty="0"/>
               <a:t>Il processore del kit, in numeri: insieme di istruzioni RV32IMAC; un core principale fino a 160 MHz con pipeline a quattro stadi, e un secondo core a basso consumo; modi macchina e utente; nessuna virgola mobile; 512 KB di SRAM, 320 KB di ROM e una flash esterna; radio e periferiche sullo stesso chip. Un calcolatore completo in pochi millimetri quadrati, per circa due euro: processore, memoria e ingresso/uscita ci sono tutti, come nel modello.
+DA COMPRENDERE OGGI: il processore RV32.
 Per il docente: Dal datasheet Espressif dell'ESP32-C6. Un calcolatore completo su un chip di pochi millimetri quadrati che costa circa due euro: processore, memoria e ingresso/uscita ci sono tutti, come nel modello delle prime slide.</a:t>
             </a:r>
             <a:endParaRPr lang="en-US" dirty="0"/>
@@ -1645,6 +1654,7 @@
             <a:r>
               <a:rPr lang="en-US" dirty="0"/>
               <a:t>Cinque conclusioni. Il processore comanda e controlla, appoggiandosi alla memoria e all'ingresso/uscita. I registri sono locazioni di memoria, dentro o fuori dal processore. I tipi di registri e il loro uso determinano il modello: accumulatore, stack, registri generici. La ALU svolge le operazioni. E RISC-V è un processore load-store a registri generici, senza flag e senza istruzioni di I/O: pochi elementi, ciascuno semplice. La prossima lezione segue un'istruzione per tutta la sua vita.
+Stato di apprendimento, riepilogo. DA COMPRENDERE OGGI: accumulatore, pila, registri; il modello del processore; i registri di RISC-V; la convenzione di chiamata; la pila; il processore RV32. DA UTILIZZARE OGGI: il programma completo, gli strumenti di PRG32 (si usa, non si studia, in questo corso). DA COMPRENDERE PIÙ AVANTI: interruzioni e trap (Lezione 19). Una slide senza etichetta è contesto: una storia, un esempio, una domanda, un esercizio.
 Per il docente: Prossima lezione: istruzioni e interruzioni.</a:t>
             </a:r>
             <a:endParaRPr lang="en-US" dirty="0"/>
@@ -1734,6 +1744,7 @@
             <a:r>
               <a:rPr lang="en-US" dirty="0"/>
               <a:t>Un richiamo e una definizione. Un calcolatore ha tre sottosistemi, processore, memoria centrale e ingresso/uscita, collegati da bus. Il processore può eseguire soltanto un insieme fisso di istruzioni, da poche decine a poche centinaia, e il linguaggio macchina è l'insieme delle stringhe di bit che le codificano. Le istruzioni richiedono due tipi di cose: trasferimenti di informazione e operazioni aritmetiche o logiche. Programmi e dati stanno entrambi nella memoria centrale.
+DA COMPRENDERE OGGI: il modello del processore.
 Per il docente: RV32I, la base di RISC-V, ha circa quaranta istruzioni; con le estensioni M, A e C del kit, circa cento codifiche. Il Motorola 68000 aveva cinquantasei tipi di istruzione con molte varianti ciascuno.</a:t>
             </a:r>
             <a:endParaRPr lang="en-US" dirty="0"/>
@@ -1823,6 +1834,7 @@
             <a:r>
               <a:rPr lang="en-US" dirty="0"/>
               <a:t>Il modello di riferimento. L'unità di controllo contiene il program counter, con l'indirizzo della prossima istruzione, un registro di decodifica, con l'istruzione in esecuzione, e la rete che emette i comandi. I registri di macchina da R0 a Rn-1 sono quelli che usa il programmatore. L'unità aritmetico-logica ha due registri operando e un registro risultato. Due coppie di registri collegano il processore all'esterno: MA e MB verso la memoria, RI e RU verso ingresso e uscita. Un bus interno collega tutto.
+DA COMPRENDERE OGGI: il modello del processore.
 Per il docente: Modello di riferimento. Pur basati sullo stesso schema logico, e quindi fatti di componenti abbastanza simili, i processori in commercio possono essere molto diversi tra loro.</a:t>
             </a:r>
             <a:endParaRPr lang="en-US" dirty="0"/>
@@ -1912,6 +1924,7 @@
             <a:r>
               <a:rPr lang="en-US" dirty="0"/>
               <a:t>Ogni elemento del modello, e che cos'è in RISC-V. Il program counter è pc. I registri di macchina sono da x0 a x31, con i nomi che conoscete. I registri della ALU e quelli verso la memoria esistono nell'hardware ma sono invisibili al programmatore. Due righe dicono «assente», e sono scelte volute: non ci sono registri per ingresso e uscita, perché i dispositivi sono mappati in memoria, e non c'è un registro di stato con i flag. I registri speciali sono i CSR, riservati al software privilegiato.
+DA COMPRENDERE OGGI: il modello del processore.
 Per il docente: Le due righe «assente» sono semplificazioni volute di RISC-V, spiegate più avanti in questa lezione e nella Lezione 15. L'MC68000 della presentazione originale aveva tutti gli elementi del modello: otto registri dati e otto registri indirizzi, un registro di stato con i codici di condizione, e una circuiteria separata per le interruzioni.</a:t>
             </a:r>
             <a:endParaRPr lang="en-US" dirty="0"/>
@@ -2001,6 +2014,7 @@
             <a:r>
               <a:rPr lang="en-US" dirty="0"/>
               <a:t>Due classi di registri. I registri interni sono necessari al funzionamento del processore ma non sono visibili al programmatore: il program counter, i registri verso la memoria, quelli della ALU. I registri di macchina definiscono il modello di programmazione: sono quelli nominati nelle istruzioni. Il processore tratta tre tipi di informazione, istruzioni, indirizzi e dati, e ciascuno potrebbe avere una dimensione propria. In RV32 tutti e tre sono larghi 32 bit, e questo rende la macchina molto regolare.
+DA COMPRENDERE OGGI: il modello del processore.
 Per il docente: Tipi di dato del processore. Il «32» di RV32 è la larghezza dei registri; RV64 ha registri e indirizzi a 64 bit e le stesse istruzioni a 32 bit.</a:t>
             </a:r>
             <a:endParaRPr lang="en-US" dirty="0"/>
@@ -2090,6 +2104,7 @@
             <a:r>
               <a:rPr lang="en-US" dirty="0"/>
               <a:t>Un processore ha almeno due stati di funzionamento. In stato supervisore esegue il sistema operativo e può eseguire ogni istruzione. In stato utente esegue un programma qualunque e può eseguire tutto tranne le istruzioni privilegiate, quelle che potrebbero compromettere il sistema. RISC-V li chiama modi: il modo macchina, il più privilegiato e l'unico obbligatorio, il modo supervisore e il modo utente. Il chip del kit ha macchina e utente. Il passaggio dall'uno all'altro avviene attraverso le trap della prossima lezione.
+DA COMPRENDERE OGGI: il modello del processore. DA COMPRENDERE PIÙ AVANTI: interruzioni e trap (si studia nella Lezione 19).
 Per il docente: Stato utente o stato supervisore. RISC-V definisce tre modi di privilegio: M, il più privilegiato e l'unico obbligatorio, esegue il firmware; S esegue il kernel di un sistema operativo come Linux; U esegue le applicazioni. L'ESP32-C6 realizza M e U. Il cambio di modo avviene attraverso le trap (Lezione 19).</a:t>
             </a:r>
             <a:endParaRPr lang="en-US" dirty="0"/>
@@ -2179,6 +2194,7 @@
             <a:r>
               <a:rPr lang="en-US" dirty="0"/>
               <a:t>Cinque funzioni dei registri. Transito: portare i dati tra memoria e registri. Accumulo: contenere operandi e risultati dell'aritmetica. Indirizzamento: contenere un indirizzo o una sua parte, come fanno i registri base e indice. Puntatore allo stack: indicare la cima di uno stack in memoria. Flag: singoli bit che registrano eventi come zero, segno, overflow e riporto, per condizionare le istruzioni successive. In RISC-V i registri generici svolgono le prime quattro funzioni; la quinta non esiste come registro.
+DA COMPRENDERE OGGI: i registri di RISC-V.
 Per il docente: Funzione dei registri. In RISC-V le prime quattro funzioni sono svolte tutte dai registri generici; la quinta non esiste come registro.</a:t>
             </a:r>
             <a:endParaRPr lang="en-US" dirty="0"/>
@@ -2268,6 +2284,7 @@
             <a:r>
               <a:rPr lang="en-US" dirty="0"/>
               <a:t>La tabella completa dei registri di RISC-V, con numeri, nomi e ruoli. Ne avete usati la maggior parte: zero, ra, sp, i temporanei da t0 a t6, gli argomenti da a0 ad a7, i registri salvati da s0 a s11. Due sono nuovi: gp e tp, usati da compilatori e sistemi operativi. L'hardware tratta allo stesso modo i registri da x1 a x31; solo x0 è speciale. I ruoli vengono dalla convenzione di chiamata. Il program counter non sta nel banco.
+DA COMPRENDERE OGGI: i registri di RISC-V; la convenzione di chiamata.
 Per il docente: L'hardware tratta allo stesso modo i registri da x1 a x31; solo x0 è speciale. I ruoli vengono dalla convenzione di chiamata (Lezione 02). L'MC68000 separava invece i registri dati D0-D7 dai registri indirizzi A0-A7, con A7 come puntatore allo stack.</a:t>
             </a:r>
             <a:endParaRPr lang="en-US" dirty="0"/>
@@ -3405,6 +3422,420 @@
       </p:pic>
       <p:sp>
         <p:nvSpPr>
+          <p:cNvPr id="15" name="Shape 12"/>
+          <p:cNvSpPr/>
+          <p:nvPr/>
+        </p:nvSpPr>
+        <p:spPr>
+          <a:xfrm>
+            <a:off x="8910777" y="91440"/>
+            <a:ext cx="2732278" cy="274320"/>
+          </a:xfrm>
+          <a:prstGeom prst="rect">
+            <a:avLst/>
+          </a:prstGeom>
+          <a:solidFill>
+            <a:srgbClr val="F3E8FF"/>
+          </a:solidFill>
+          <a:ln w="12700">
+            <a:solidFill>
+              <a:srgbClr val="7E22CE"/>
+            </a:solidFill>
+            <a:prstDash val="dash"/>
+          </a:ln>
+        </p:spPr>
+      </p:sp>
+      <p:sp>
+        <p:nvSpPr>
+          <p:cNvPr id="16" name="Shape 13"/>
+          <p:cNvSpPr/>
+          <p:nvPr/>
+        </p:nvSpPr>
+        <p:spPr>
+          <a:xfrm>
+            <a:off x="8938209" y="128016"/>
+            <a:ext cx="45720" cy="45720"/>
+          </a:xfrm>
+          <a:prstGeom prst="rect">
+            <a:avLst/>
+          </a:prstGeom>
+          <a:solidFill>
+            <a:srgbClr val="7E22CE"/>
+          </a:solidFill>
+          <a:ln w="12700">
+            <a:solidFill>
+              <a:srgbClr val="7E22CE"/>
+            </a:solidFill>
+            <a:prstDash val="solid"/>
+          </a:ln>
+        </p:spPr>
+      </p:sp>
+      <p:sp>
+        <p:nvSpPr>
+          <p:cNvPr id="17" name="Shape 14"/>
+          <p:cNvSpPr/>
+          <p:nvPr/>
+        </p:nvSpPr>
+        <p:spPr>
+          <a:xfrm>
+            <a:off x="8938209" y="205740"/>
+            <a:ext cx="45720" cy="45720"/>
+          </a:xfrm>
+          <a:prstGeom prst="rect">
+            <a:avLst/>
+          </a:prstGeom>
+          <a:solidFill>
+            <a:srgbClr val="7E22CE"/>
+          </a:solidFill>
+          <a:ln w="12700">
+            <a:solidFill>
+              <a:srgbClr val="7E22CE"/>
+            </a:solidFill>
+            <a:prstDash val="solid"/>
+          </a:ln>
+        </p:spPr>
+      </p:sp>
+      <p:sp>
+        <p:nvSpPr>
+          <p:cNvPr id="18" name="Shape 15"/>
+          <p:cNvSpPr/>
+          <p:nvPr/>
+        </p:nvSpPr>
+        <p:spPr>
+          <a:xfrm>
+            <a:off x="8938209" y="283464"/>
+            <a:ext cx="45720" cy="45720"/>
+          </a:xfrm>
+          <a:prstGeom prst="rect">
+            <a:avLst/>
+          </a:prstGeom>
+          <a:solidFill>
+            <a:srgbClr val="7E22CE"/>
+          </a:solidFill>
+          <a:ln w="12700">
+            <a:solidFill>
+              <a:srgbClr val="7E22CE"/>
+            </a:solidFill>
+            <a:prstDash val="solid"/>
+          </a:ln>
+        </p:spPr>
+      </p:sp>
+      <p:pic>
+        <p:nvPicPr>
+          <p:cNvPr id="19" name="Image 1" descr="preencoded.png">    </p:cNvPr>
+          <p:cNvPicPr>
+            <a:picLocks noChangeAspect="1"/>
+          </p:cNvPicPr>
+          <p:nvPr/>
+        </p:nvPicPr>
+        <p:blipFill>
+          <a:blip r:embed="rId2"/>
+          <a:stretch>
+            <a:fillRect/>
+          </a:stretch>
+        </p:blipFill>
+        <p:spPr>
+          <a:xfrm>
+            <a:off x="9038793" y="128016"/>
+            <a:ext cx="201168" cy="201168"/>
+          </a:xfrm>
+          <a:prstGeom prst="rect">
+            <a:avLst/>
+          </a:prstGeom>
+        </p:spPr>
+      </p:pic>
+      <p:sp>
+        <p:nvSpPr>
+          <p:cNvPr id="20" name="Text 16"/>
+          <p:cNvSpPr txBox="1"/>
+          <p:nvPr/>
+        </p:nvSpPr>
+        <p:spPr>
+          <a:xfrm>
+            <a:off x="9294825" y="91440"/>
+            <a:ext cx="2311654" cy="274320"/>
+          </a:xfrm>
+          <a:prstGeom prst="rect">
+            <a:avLst/>
+          </a:prstGeom>
+          <a:noFill/>
+          <a:ln/>
+        </p:spPr>
+        <p:txBody>
+          <a:bodyPr wrap="square" lIns="0" tIns="0" rIns="0" bIns="0" rtlCol="0" anchor="ctr"/>
+          <a:lstStyle/>
+          <a:p>
+            <a:pPr indent="0" marL="0">
+              <a:buNone/>
+            </a:pPr>
+            <a:r>
+              <a:rPr lang="en-US" sz="1100" b="1" dirty="0">
+                <a:solidFill>
+                  <a:srgbClr val="6B21A8"/>
+                </a:solidFill>
+                <a:latin typeface="Calibri" pitchFamily="34" charset="0"/>
+                <a:ea typeface="Calibri" pitchFamily="34" charset="-122"/>
+                <a:cs typeface="Calibri" pitchFamily="34" charset="-120"/>
+              </a:rPr>
+              <a:t>DA COMPRENDERE PIÙ AVANTI</a:t>
+            </a:r>
+            <a:endParaRPr lang="en-US" sz="1100" dirty="0"/>
+          </a:p>
+        </p:txBody>
+      </p:sp>
+      <p:sp>
+        <p:nvSpPr>
+          <p:cNvPr id="21" name="Shape 17"/>
+          <p:cNvSpPr/>
+          <p:nvPr/>
+        </p:nvSpPr>
+        <p:spPr>
+          <a:xfrm>
+            <a:off x="6675069" y="91440"/>
+            <a:ext cx="2125980" cy="274320"/>
+          </a:xfrm>
+          <a:prstGeom prst="rect">
+            <a:avLst/>
+          </a:prstGeom>
+          <a:solidFill>
+            <a:srgbClr val="FEF3C7"/>
+          </a:solidFill>
+          <a:ln w="12700">
+            <a:solidFill>
+              <a:srgbClr val="B45309"/>
+            </a:solidFill>
+            <a:prstDash val="solid"/>
+          </a:ln>
+        </p:spPr>
+      </p:sp>
+      <p:sp>
+        <p:nvSpPr>
+          <p:cNvPr id="22" name="Shape 18"/>
+          <p:cNvSpPr/>
+          <p:nvPr/>
+        </p:nvSpPr>
+        <p:spPr>
+          <a:xfrm>
+            <a:off x="6675069" y="91440"/>
+            <a:ext cx="27432" cy="274320"/>
+          </a:xfrm>
+          <a:prstGeom prst="rect">
+            <a:avLst/>
+          </a:prstGeom>
+          <a:solidFill>
+            <a:srgbClr val="B45309"/>
+          </a:solidFill>
+          <a:ln w="12700">
+            <a:solidFill>
+              <a:srgbClr val="B45309"/>
+            </a:solidFill>
+            <a:prstDash val="solid"/>
+          </a:ln>
+        </p:spPr>
+      </p:sp>
+      <p:sp>
+        <p:nvSpPr>
+          <p:cNvPr id="23" name="Shape 19"/>
+          <p:cNvSpPr/>
+          <p:nvPr/>
+        </p:nvSpPr>
+        <p:spPr>
+          <a:xfrm>
+            <a:off x="6729933" y="91440"/>
+            <a:ext cx="27432" cy="274320"/>
+          </a:xfrm>
+          <a:prstGeom prst="rect">
+            <a:avLst/>
+          </a:prstGeom>
+          <a:solidFill>
+            <a:srgbClr val="B45309"/>
+          </a:solidFill>
+          <a:ln w="12700">
+            <a:solidFill>
+              <a:srgbClr val="B45309"/>
+            </a:solidFill>
+            <a:prstDash val="solid"/>
+          </a:ln>
+        </p:spPr>
+      </p:sp>
+      <p:pic>
+        <p:nvPicPr>
+          <p:cNvPr id="24" name="Image 2" descr="preencoded.png">    </p:cNvPr>
+          <p:cNvPicPr>
+            <a:picLocks noChangeAspect="1"/>
+          </p:cNvPicPr>
+          <p:nvPr/>
+        </p:nvPicPr>
+        <p:blipFill>
+          <a:blip r:embed="rId3"/>
+          <a:stretch>
+            <a:fillRect/>
+          </a:stretch>
+        </p:blipFill>
+        <p:spPr>
+          <a:xfrm>
+            <a:off x="6803085" y="128016"/>
+            <a:ext cx="201168" cy="201168"/>
+          </a:xfrm>
+          <a:prstGeom prst="rect">
+            <a:avLst/>
+          </a:prstGeom>
+        </p:spPr>
+      </p:pic>
+      <p:sp>
+        <p:nvSpPr>
+          <p:cNvPr id="25" name="Text 20"/>
+          <p:cNvSpPr txBox="1"/>
+          <p:nvPr/>
+        </p:nvSpPr>
+        <p:spPr>
+          <a:xfrm>
+            <a:off x="7059117" y="91440"/>
+            <a:ext cx="1705356" cy="274320"/>
+          </a:xfrm>
+          <a:prstGeom prst="rect">
+            <a:avLst/>
+          </a:prstGeom>
+          <a:noFill/>
+          <a:ln/>
+        </p:spPr>
+        <p:txBody>
+          <a:bodyPr wrap="square" lIns="0" tIns="0" rIns="0" bIns="0" rtlCol="0" anchor="ctr"/>
+          <a:lstStyle/>
+          <a:p>
+            <a:pPr indent="0" marL="0">
+              <a:buNone/>
+            </a:pPr>
+            <a:r>
+              <a:rPr lang="en-US" sz="1100" b="1" dirty="0">
+                <a:solidFill>
+                  <a:srgbClr val="92400E"/>
+                </a:solidFill>
+                <a:latin typeface="Calibri" pitchFamily="34" charset="0"/>
+                <a:ea typeface="Calibri" pitchFamily="34" charset="-122"/>
+                <a:cs typeface="Calibri" pitchFamily="34" charset="-120"/>
+              </a:rPr>
+              <a:t>DA UTILIZZARE OGGI</a:t>
+            </a:r>
+            <a:endParaRPr lang="en-US" sz="1100" dirty="0"/>
+          </a:p>
+        </p:txBody>
+      </p:sp>
+      <p:sp>
+        <p:nvSpPr>
+          <p:cNvPr id="26" name="Shape 21"/>
+          <p:cNvSpPr/>
+          <p:nvPr/>
+        </p:nvSpPr>
+        <p:spPr>
+          <a:xfrm>
+            <a:off x="4352747" y="91440"/>
+            <a:ext cx="2212594" cy="274320"/>
+          </a:xfrm>
+          <a:prstGeom prst="rect">
+            <a:avLst/>
+          </a:prstGeom>
+          <a:solidFill>
+            <a:srgbClr val="E0F2FE"/>
+          </a:solidFill>
+          <a:ln w="12700">
+            <a:solidFill>
+              <a:srgbClr val="0369A1"/>
+            </a:solidFill>
+            <a:prstDash val="solid"/>
+          </a:ln>
+        </p:spPr>
+      </p:sp>
+      <p:sp>
+        <p:nvSpPr>
+          <p:cNvPr id="27" name="Shape 22"/>
+          <p:cNvSpPr/>
+          <p:nvPr/>
+        </p:nvSpPr>
+        <p:spPr>
+          <a:xfrm>
+            <a:off x="4352747" y="91440"/>
+            <a:ext cx="73152" cy="274320"/>
+          </a:xfrm>
+          <a:prstGeom prst="rect">
+            <a:avLst/>
+          </a:prstGeom>
+          <a:solidFill>
+            <a:srgbClr val="0369A1"/>
+          </a:solidFill>
+          <a:ln w="12700">
+            <a:solidFill>
+              <a:srgbClr val="0369A1"/>
+            </a:solidFill>
+            <a:prstDash val="solid"/>
+          </a:ln>
+        </p:spPr>
+      </p:sp>
+      <p:pic>
+        <p:nvPicPr>
+          <p:cNvPr id="28" name="Image 3" descr="preencoded.png">    </p:cNvPr>
+          <p:cNvPicPr>
+            <a:picLocks noChangeAspect="1"/>
+          </p:cNvPicPr>
+          <p:nvPr/>
+        </p:nvPicPr>
+        <p:blipFill>
+          <a:blip r:embed="rId4"/>
+          <a:stretch>
+            <a:fillRect/>
+          </a:stretch>
+        </p:blipFill>
+        <p:spPr>
+          <a:xfrm>
+            <a:off x="4480763" y="128016"/>
+            <a:ext cx="201168" cy="201168"/>
+          </a:xfrm>
+          <a:prstGeom prst="rect">
+            <a:avLst/>
+          </a:prstGeom>
+        </p:spPr>
+      </p:pic>
+      <p:sp>
+        <p:nvSpPr>
+          <p:cNvPr id="29" name="Text 23"/>
+          <p:cNvSpPr txBox="1"/>
+          <p:nvPr/>
+        </p:nvSpPr>
+        <p:spPr>
+          <a:xfrm>
+            <a:off x="4736795" y="91440"/>
+            <a:ext cx="1791970" cy="274320"/>
+          </a:xfrm>
+          <a:prstGeom prst="rect">
+            <a:avLst/>
+          </a:prstGeom>
+          <a:noFill/>
+          <a:ln/>
+        </p:spPr>
+        <p:txBody>
+          <a:bodyPr wrap="square" lIns="0" tIns="0" rIns="0" bIns="0" rtlCol="0" anchor="ctr"/>
+          <a:lstStyle/>
+          <a:p>
+            <a:pPr indent="0" marL="0">
+              <a:buNone/>
+            </a:pPr>
+            <a:r>
+              <a:rPr lang="en-US" sz="1100" b="1" dirty="0">
+                <a:solidFill>
+                  <a:srgbClr val="075985"/>
+                </a:solidFill>
+                <a:latin typeface="Calibri" pitchFamily="34" charset="0"/>
+                <a:ea typeface="Calibri" pitchFamily="34" charset="-122"/>
+                <a:cs typeface="Calibri" pitchFamily="34" charset="-120"/>
+              </a:rPr>
+              <a:t>DA COMPRENDERE OGGI</a:t>
+            </a:r>
+            <a:endParaRPr lang="en-US" sz="1100" dirty="0"/>
+          </a:p>
+        </p:txBody>
+      </p:sp>
+      <p:sp>
+        <p:nvSpPr>
           <p:cNvPr id="25" name="Slide Number Placeholder 0"/>
           <p:cNvSpPr>
             <a:spLocks noGrp="1"/>
@@ -3874,6 +4305,133 @@
               <a:t>Meno stato nascosto: pipeline più semplici, interruzioni più semplici</a:t>
             </a:r>
             <a:endParaRPr lang="en-US" sz="1900" dirty="0"/>
+          </a:p>
+        </p:txBody>
+      </p:sp>
+      <p:sp>
+        <p:nvSpPr>
+          <p:cNvPr id="9" name="Shape 7"/>
+          <p:cNvSpPr/>
+          <p:nvPr/>
+        </p:nvSpPr>
+        <p:spPr>
+          <a:xfrm>
+            <a:off x="7920304" y="91440"/>
+            <a:ext cx="3722751" cy="274320"/>
+          </a:xfrm>
+          <a:prstGeom prst="rect">
+            <a:avLst/>
+          </a:prstGeom>
+          <a:solidFill>
+            <a:srgbClr val="E0F2FE"/>
+          </a:solidFill>
+          <a:ln w="12700">
+            <a:solidFill>
+              <a:srgbClr val="0369A1"/>
+            </a:solidFill>
+            <a:prstDash val="solid"/>
+          </a:ln>
+        </p:spPr>
+      </p:sp>
+      <p:sp>
+        <p:nvSpPr>
+          <p:cNvPr id="10" name="Shape 8"/>
+          <p:cNvSpPr/>
+          <p:nvPr/>
+        </p:nvSpPr>
+        <p:spPr>
+          <a:xfrm>
+            <a:off x="7920304" y="91440"/>
+            <a:ext cx="73152" cy="274320"/>
+          </a:xfrm>
+          <a:prstGeom prst="rect">
+            <a:avLst/>
+          </a:prstGeom>
+          <a:solidFill>
+            <a:srgbClr val="0369A1"/>
+          </a:solidFill>
+          <a:ln w="12700">
+            <a:solidFill>
+              <a:srgbClr val="0369A1"/>
+            </a:solidFill>
+            <a:prstDash val="solid"/>
+          </a:ln>
+        </p:spPr>
+      </p:sp>
+      <p:pic>
+        <p:nvPicPr>
+          <p:cNvPr id="11" name="Image 0" descr="preencoded.png">    </p:cNvPr>
+          <p:cNvPicPr>
+            <a:picLocks noChangeAspect="1"/>
+          </p:cNvPicPr>
+          <p:nvPr/>
+        </p:nvPicPr>
+        <p:blipFill>
+          <a:blip r:embed="rId1"/>
+          <a:stretch>
+            <a:fillRect/>
+          </a:stretch>
+        </p:blipFill>
+        <p:spPr>
+          <a:xfrm>
+            <a:off x="8048320" y="128016"/>
+            <a:ext cx="201168" cy="201168"/>
+          </a:xfrm>
+          <a:prstGeom prst="rect">
+            <a:avLst/>
+          </a:prstGeom>
+        </p:spPr>
+      </p:pic>
+      <p:sp>
+        <p:nvSpPr>
+          <p:cNvPr id="12" name="Text 9"/>
+          <p:cNvSpPr txBox="1"/>
+          <p:nvPr/>
+        </p:nvSpPr>
+        <p:spPr>
+          <a:xfrm>
+            <a:off x="8304352" y="91440"/>
+            <a:ext cx="3302127" cy="274320"/>
+          </a:xfrm>
+          <a:prstGeom prst="rect">
+            <a:avLst/>
+          </a:prstGeom>
+          <a:noFill/>
+          <a:ln/>
+        </p:spPr>
+        <p:txBody>
+          <a:bodyPr wrap="square" lIns="0" tIns="0" rIns="0" bIns="0" rtlCol="0" anchor="ctr"/>
+          <a:lstStyle/>
+          <a:p>
+            <a:pPr indent="0" marL="0">
+              <a:buNone/>
+            </a:pPr>
+            <a:r>
+              <a:rPr lang="en-US" sz="1100" b="1" dirty="0">
+                <a:solidFill>
+                  <a:srgbClr val="075985"/>
+                </a:solidFill>
+                <a:latin typeface="Calibri" pitchFamily="34" charset="0"/>
+                <a:ea typeface="Calibri" pitchFamily="34" charset="-122"/>
+                <a:cs typeface="Calibri" pitchFamily="34" charset="-120"/>
+              </a:rPr>
+              <a:t>DA COMPRENDERE OGGI</a:t>
+            </a:r>
+            <a:pPr indent="0" marL="0">
+              <a:buNone/>
+            </a:pPr>
+            <a:r>
+              <a:rPr lang="en-US" sz="1100" dirty="0">
+                <a:solidFill>
+                  <a:srgbClr val="075985"/>
+                </a:solidFill>
+                <a:latin typeface="Calibri" pitchFamily="34" charset="0"/>
+                <a:ea typeface="Calibri" pitchFamily="34" charset="-122"/>
+                <a:cs typeface="Calibri" pitchFamily="34" charset="-120"/>
+              </a:rPr>
+              <a:t> · i registri di RISC-V</a:t>
+            </a:r>
+            <a:endParaRPr lang="en-US" sz="1100" dirty="0"/>
           </a:p>
         </p:txBody>
       </p:sp>
@@ -5260,6 +5818,324 @@
       </p:graphicFrame>
       <p:sp>
         <p:nvSpPr>
+          <p:cNvPr id="4" name="Shape 1"/>
+          <p:cNvSpPr/>
+          <p:nvPr/>
+        </p:nvSpPr>
+        <p:spPr>
+          <a:xfrm>
+            <a:off x="6503746" y="91440"/>
+            <a:ext cx="5139309" cy="274320"/>
+          </a:xfrm>
+          <a:prstGeom prst="rect">
+            <a:avLst/>
+          </a:prstGeom>
+          <a:solidFill>
+            <a:srgbClr val="F3E8FF"/>
+          </a:solidFill>
+          <a:ln w="12700">
+            <a:solidFill>
+              <a:srgbClr val="7E22CE"/>
+            </a:solidFill>
+            <a:prstDash val="dash"/>
+          </a:ln>
+        </p:spPr>
+      </p:sp>
+      <p:sp>
+        <p:nvSpPr>
+          <p:cNvPr id="5" name="Shape 2"/>
+          <p:cNvSpPr/>
+          <p:nvPr/>
+        </p:nvSpPr>
+        <p:spPr>
+          <a:xfrm>
+            <a:off x="6531178" y="128016"/>
+            <a:ext cx="45720" cy="45720"/>
+          </a:xfrm>
+          <a:prstGeom prst="rect">
+            <a:avLst/>
+          </a:prstGeom>
+          <a:solidFill>
+            <a:srgbClr val="7E22CE"/>
+          </a:solidFill>
+          <a:ln w="12700">
+            <a:solidFill>
+              <a:srgbClr val="7E22CE"/>
+            </a:solidFill>
+            <a:prstDash val="solid"/>
+          </a:ln>
+        </p:spPr>
+      </p:sp>
+      <p:sp>
+        <p:nvSpPr>
+          <p:cNvPr id="6" name="Shape 3"/>
+          <p:cNvSpPr/>
+          <p:nvPr/>
+        </p:nvSpPr>
+        <p:spPr>
+          <a:xfrm>
+            <a:off x="6531178" y="205740"/>
+            <a:ext cx="45720" cy="45720"/>
+          </a:xfrm>
+          <a:prstGeom prst="rect">
+            <a:avLst/>
+          </a:prstGeom>
+          <a:solidFill>
+            <a:srgbClr val="7E22CE"/>
+          </a:solidFill>
+          <a:ln w="12700">
+            <a:solidFill>
+              <a:srgbClr val="7E22CE"/>
+            </a:solidFill>
+            <a:prstDash val="solid"/>
+          </a:ln>
+        </p:spPr>
+      </p:sp>
+      <p:sp>
+        <p:nvSpPr>
+          <p:cNvPr id="7" name="Shape 4"/>
+          <p:cNvSpPr/>
+          <p:nvPr/>
+        </p:nvSpPr>
+        <p:spPr>
+          <a:xfrm>
+            <a:off x="6531178" y="283464"/>
+            <a:ext cx="45720" cy="45720"/>
+          </a:xfrm>
+          <a:prstGeom prst="rect">
+            <a:avLst/>
+          </a:prstGeom>
+          <a:solidFill>
+            <a:srgbClr val="7E22CE"/>
+          </a:solidFill>
+          <a:ln w="12700">
+            <a:solidFill>
+              <a:srgbClr val="7E22CE"/>
+            </a:solidFill>
+            <a:prstDash val="solid"/>
+          </a:ln>
+        </p:spPr>
+      </p:sp>
+      <p:pic>
+        <p:nvPicPr>
+          <p:cNvPr id="8" name="Image 0" descr="preencoded.png">    </p:cNvPr>
+          <p:cNvPicPr>
+            <a:picLocks noChangeAspect="1"/>
+          </p:cNvPicPr>
+          <p:nvPr/>
+        </p:nvPicPr>
+        <p:blipFill>
+          <a:blip r:embed="rId1"/>
+          <a:stretch>
+            <a:fillRect/>
+          </a:stretch>
+        </p:blipFill>
+        <p:spPr>
+          <a:xfrm>
+            <a:off x="6631762" y="128016"/>
+            <a:ext cx="201168" cy="201168"/>
+          </a:xfrm>
+          <a:prstGeom prst="rect">
+            <a:avLst/>
+          </a:prstGeom>
+        </p:spPr>
+      </p:pic>
+      <p:sp>
+        <p:nvSpPr>
+          <p:cNvPr id="9" name="Text 5"/>
+          <p:cNvSpPr txBox="1"/>
+          <p:nvPr/>
+        </p:nvSpPr>
+        <p:spPr>
+          <a:xfrm>
+            <a:off x="6887794" y="91440"/>
+            <a:ext cx="4718685" cy="274320"/>
+          </a:xfrm>
+          <a:prstGeom prst="rect">
+            <a:avLst/>
+          </a:prstGeom>
+          <a:noFill/>
+          <a:ln/>
+        </p:spPr>
+        <p:txBody>
+          <a:bodyPr wrap="square" lIns="0" tIns="0" rIns="0" bIns="0" rtlCol="0" anchor="ctr"/>
+          <a:lstStyle/>
+          <a:p>
+            <a:pPr indent="0" marL="0">
+              <a:buNone/>
+            </a:pPr>
+            <a:r>
+              <a:rPr lang="en-US" sz="1100" b="1" dirty="0">
+                <a:solidFill>
+                  <a:srgbClr val="6B21A8"/>
+                </a:solidFill>
+                <a:latin typeface="Calibri" pitchFamily="34" charset="0"/>
+                <a:ea typeface="Calibri" pitchFamily="34" charset="-122"/>
+                <a:cs typeface="Calibri" pitchFamily="34" charset="-120"/>
+              </a:rPr>
+              <a:t>DA COMPRENDERE PIÙ AVANTI</a:t>
+            </a:r>
+            <a:pPr indent="0" marL="0">
+              <a:buNone/>
+            </a:pPr>
+            <a:r>
+              <a:rPr lang="en-US" sz="1100" dirty="0">
+                <a:solidFill>
+                  <a:srgbClr val="6B21A8"/>
+                </a:solidFill>
+                <a:latin typeface="Calibri" pitchFamily="34" charset="0"/>
+                <a:ea typeface="Calibri" pitchFamily="34" charset="-122"/>
+                <a:cs typeface="Calibri" pitchFamily="34" charset="-120"/>
+              </a:rPr>
+              <a:t> · interruzioni e trap</a:t>
+            </a:r>
+            <a:pPr indent="0" marL="0">
+              <a:buNone/>
+            </a:pPr>
+            <a:r>
+              <a:rPr lang="en-US" sz="1100" b="1" dirty="0">
+                <a:solidFill>
+                  <a:srgbClr val="6B21A8"/>
+                </a:solidFill>
+                <a:latin typeface="Calibri" pitchFamily="34" charset="0"/>
+                <a:ea typeface="Calibri" pitchFamily="34" charset="-122"/>
+                <a:cs typeface="Calibri" pitchFamily="34" charset="-120"/>
+              </a:rPr>
+              <a:t> → Lezione 19</a:t>
+            </a:r>
+            <a:endParaRPr lang="en-US" sz="1100" dirty="0"/>
+          </a:p>
+        </p:txBody>
+      </p:sp>
+      <p:sp>
+        <p:nvSpPr>
+          <p:cNvPr id="10" name="Shape 6"/>
+          <p:cNvSpPr/>
+          <p:nvPr/>
+        </p:nvSpPr>
+        <p:spPr>
+          <a:xfrm>
+            <a:off x="2671267" y="91440"/>
+            <a:ext cx="3722751" cy="274320"/>
+          </a:xfrm>
+          <a:prstGeom prst="rect">
+            <a:avLst/>
+          </a:prstGeom>
+          <a:solidFill>
+            <a:srgbClr val="E0F2FE"/>
+          </a:solidFill>
+          <a:ln w="12700">
+            <a:solidFill>
+              <a:srgbClr val="0369A1"/>
+            </a:solidFill>
+            <a:prstDash val="solid"/>
+          </a:ln>
+        </p:spPr>
+      </p:sp>
+      <p:sp>
+        <p:nvSpPr>
+          <p:cNvPr id="11" name="Shape 7"/>
+          <p:cNvSpPr/>
+          <p:nvPr/>
+        </p:nvSpPr>
+        <p:spPr>
+          <a:xfrm>
+            <a:off x="2671267" y="91440"/>
+            <a:ext cx="73152" cy="274320"/>
+          </a:xfrm>
+          <a:prstGeom prst="rect">
+            <a:avLst/>
+          </a:prstGeom>
+          <a:solidFill>
+            <a:srgbClr val="0369A1"/>
+          </a:solidFill>
+          <a:ln w="12700">
+            <a:solidFill>
+              <a:srgbClr val="0369A1"/>
+            </a:solidFill>
+            <a:prstDash val="solid"/>
+          </a:ln>
+        </p:spPr>
+      </p:sp>
+      <p:pic>
+        <p:nvPicPr>
+          <p:cNvPr id="12" name="Image 1" descr="preencoded.png">    </p:cNvPr>
+          <p:cNvPicPr>
+            <a:picLocks noChangeAspect="1"/>
+          </p:cNvPicPr>
+          <p:nvPr/>
+        </p:nvPicPr>
+        <p:blipFill>
+          <a:blip r:embed="rId2"/>
+          <a:stretch>
+            <a:fillRect/>
+          </a:stretch>
+        </p:blipFill>
+        <p:spPr>
+          <a:xfrm>
+            <a:off x="2799283" y="128016"/>
+            <a:ext cx="201168" cy="201168"/>
+          </a:xfrm>
+          <a:prstGeom prst="rect">
+            <a:avLst/>
+          </a:prstGeom>
+        </p:spPr>
+      </p:pic>
+      <p:sp>
+        <p:nvSpPr>
+          <p:cNvPr id="13" name="Text 8"/>
+          <p:cNvSpPr txBox="1"/>
+          <p:nvPr/>
+        </p:nvSpPr>
+        <p:spPr>
+          <a:xfrm>
+            <a:off x="3055315" y="91440"/>
+            <a:ext cx="3302127" cy="274320"/>
+          </a:xfrm>
+          <a:prstGeom prst="rect">
+            <a:avLst/>
+          </a:prstGeom>
+          <a:noFill/>
+          <a:ln/>
+        </p:spPr>
+        <p:txBody>
+          <a:bodyPr wrap="square" lIns="0" tIns="0" rIns="0" bIns="0" rtlCol="0" anchor="ctr"/>
+          <a:lstStyle/>
+          <a:p>
+            <a:pPr indent="0" marL="0">
+              <a:buNone/>
+            </a:pPr>
+            <a:r>
+              <a:rPr lang="en-US" sz="1100" b="1" dirty="0">
+                <a:solidFill>
+                  <a:srgbClr val="075985"/>
+                </a:solidFill>
+                <a:latin typeface="Calibri" pitchFamily="34" charset="0"/>
+                <a:ea typeface="Calibri" pitchFamily="34" charset="-122"/>
+                <a:cs typeface="Calibri" pitchFamily="34" charset="-120"/>
+              </a:rPr>
+              <a:t>DA COMPRENDERE OGGI</a:t>
+            </a:r>
+            <a:pPr indent="0" marL="0">
+              <a:buNone/>
+            </a:pPr>
+            <a:r>
+              <a:rPr lang="en-US" sz="1100" dirty="0">
+                <a:solidFill>
+                  <a:srgbClr val="075985"/>
+                </a:solidFill>
+                <a:latin typeface="Calibri" pitchFamily="34" charset="0"/>
+                <a:ea typeface="Calibri" pitchFamily="34" charset="-122"/>
+                <a:cs typeface="Calibri" pitchFamily="34" charset="-120"/>
+              </a:rPr>
+              <a:t> · i registri di RISC-V</a:t>
+            </a:r>
+            <a:endParaRPr lang="en-US" sz="1100" dirty="0"/>
+          </a:p>
+        </p:txBody>
+      </p:sp>
+      <p:sp>
+        <p:nvSpPr>
           <p:cNvPr id="25" name="Slide Number Placeholder 0"/>
           <p:cNvSpPr>
             <a:spLocks noGrp="1"/>
@@ -5814,6 +6690,133 @@
       </p:sp>
       <p:sp>
         <p:nvSpPr>
+          <p:cNvPr id="16" name="Shape 14"/>
+          <p:cNvSpPr/>
+          <p:nvPr/>
+        </p:nvSpPr>
+        <p:spPr>
+          <a:xfrm>
+            <a:off x="8773871" y="91440"/>
+            <a:ext cx="2869184" cy="274320"/>
+          </a:xfrm>
+          <a:prstGeom prst="rect">
+            <a:avLst/>
+          </a:prstGeom>
+          <a:solidFill>
+            <a:srgbClr val="E0F2FE"/>
+          </a:solidFill>
+          <a:ln w="12700">
+            <a:solidFill>
+              <a:srgbClr val="0369A1"/>
+            </a:solidFill>
+            <a:prstDash val="solid"/>
+          </a:ln>
+        </p:spPr>
+      </p:sp>
+      <p:sp>
+        <p:nvSpPr>
+          <p:cNvPr id="17" name="Shape 15"/>
+          <p:cNvSpPr/>
+          <p:nvPr/>
+        </p:nvSpPr>
+        <p:spPr>
+          <a:xfrm>
+            <a:off x="8773871" y="91440"/>
+            <a:ext cx="73152" cy="274320"/>
+          </a:xfrm>
+          <a:prstGeom prst="rect">
+            <a:avLst/>
+          </a:prstGeom>
+          <a:solidFill>
+            <a:srgbClr val="0369A1"/>
+          </a:solidFill>
+          <a:ln w="12700">
+            <a:solidFill>
+              <a:srgbClr val="0369A1"/>
+            </a:solidFill>
+            <a:prstDash val="solid"/>
+          </a:ln>
+        </p:spPr>
+      </p:sp>
+      <p:pic>
+        <p:nvPicPr>
+          <p:cNvPr id="18" name="Image 0" descr="preencoded.png">    </p:cNvPr>
+          <p:cNvPicPr>
+            <a:picLocks noChangeAspect="1"/>
+          </p:cNvPicPr>
+          <p:nvPr/>
+        </p:nvPicPr>
+        <p:blipFill>
+          <a:blip r:embed="rId1"/>
+          <a:stretch>
+            <a:fillRect/>
+          </a:stretch>
+        </p:blipFill>
+        <p:spPr>
+          <a:xfrm>
+            <a:off x="8901887" y="128016"/>
+            <a:ext cx="201168" cy="201168"/>
+          </a:xfrm>
+          <a:prstGeom prst="rect">
+            <a:avLst/>
+          </a:prstGeom>
+        </p:spPr>
+      </p:pic>
+      <p:sp>
+        <p:nvSpPr>
+          <p:cNvPr id="19" name="Text 16"/>
+          <p:cNvSpPr txBox="1"/>
+          <p:nvPr/>
+        </p:nvSpPr>
+        <p:spPr>
+          <a:xfrm>
+            <a:off x="9157919" y="91440"/>
+            <a:ext cx="2448560" cy="274320"/>
+          </a:xfrm>
+          <a:prstGeom prst="rect">
+            <a:avLst/>
+          </a:prstGeom>
+          <a:noFill/>
+          <a:ln/>
+        </p:spPr>
+        <p:txBody>
+          <a:bodyPr wrap="square" lIns="0" tIns="0" rIns="0" bIns="0" rtlCol="0" anchor="ctr"/>
+          <a:lstStyle/>
+          <a:p>
+            <a:pPr indent="0" marL="0">
+              <a:buNone/>
+            </a:pPr>
+            <a:r>
+              <a:rPr lang="en-US" sz="1100" b="1" dirty="0">
+                <a:solidFill>
+                  <a:srgbClr val="075985"/>
+                </a:solidFill>
+                <a:latin typeface="Calibri" pitchFamily="34" charset="0"/>
+                <a:ea typeface="Calibri" pitchFamily="34" charset="-122"/>
+                <a:cs typeface="Calibri" pitchFamily="34" charset="-120"/>
+              </a:rPr>
+              <a:t>DA COMPRENDERE OGGI</a:t>
+            </a:r>
+            <a:pPr indent="0" marL="0">
+              <a:buNone/>
+            </a:pPr>
+            <a:r>
+              <a:rPr lang="en-US" sz="1100" dirty="0">
+                <a:solidFill>
+                  <a:srgbClr val="075985"/>
+                </a:solidFill>
+                <a:latin typeface="Calibri" pitchFamily="34" charset="0"/>
+                <a:ea typeface="Calibri" pitchFamily="34" charset="-122"/>
+                <a:cs typeface="Calibri" pitchFamily="34" charset="-120"/>
+              </a:rPr>
+              <a:t> · la pila</a:t>
+            </a:r>
+            <a:endParaRPr lang="en-US" sz="1100" dirty="0"/>
+          </a:p>
+        </p:txBody>
+      </p:sp>
+      <p:sp>
+        <p:nvSpPr>
           <p:cNvPr id="25" name="Slide Number Placeholder 0"/>
           <p:cNvSpPr>
             <a:spLocks noGrp="1"/>
@@ -6536,6 +7539,133 @@
       </p:sp>
       <p:sp>
         <p:nvSpPr>
+          <p:cNvPr id="19" name="Shape 17"/>
+          <p:cNvSpPr/>
+          <p:nvPr/>
+        </p:nvSpPr>
+        <p:spPr>
+          <a:xfrm>
+            <a:off x="7395032" y="91440"/>
+            <a:ext cx="4248023" cy="274320"/>
+          </a:xfrm>
+          <a:prstGeom prst="rect">
+            <a:avLst/>
+          </a:prstGeom>
+          <a:solidFill>
+            <a:srgbClr val="E0F2FE"/>
+          </a:solidFill>
+          <a:ln w="12700">
+            <a:solidFill>
+              <a:srgbClr val="0369A1"/>
+            </a:solidFill>
+            <a:prstDash val="solid"/>
+          </a:ln>
+        </p:spPr>
+      </p:sp>
+      <p:sp>
+        <p:nvSpPr>
+          <p:cNvPr id="20" name="Shape 18"/>
+          <p:cNvSpPr/>
+          <p:nvPr/>
+        </p:nvSpPr>
+        <p:spPr>
+          <a:xfrm>
+            <a:off x="7395032" y="91440"/>
+            <a:ext cx="73152" cy="274320"/>
+          </a:xfrm>
+          <a:prstGeom prst="rect">
+            <a:avLst/>
+          </a:prstGeom>
+          <a:solidFill>
+            <a:srgbClr val="0369A1"/>
+          </a:solidFill>
+          <a:ln w="12700">
+            <a:solidFill>
+              <a:srgbClr val="0369A1"/>
+            </a:solidFill>
+            <a:prstDash val="solid"/>
+          </a:ln>
+        </p:spPr>
+      </p:sp>
+      <p:pic>
+        <p:nvPicPr>
+          <p:cNvPr id="21" name="Image 0" descr="preencoded.png">    </p:cNvPr>
+          <p:cNvPicPr>
+            <a:picLocks noChangeAspect="1"/>
+          </p:cNvPicPr>
+          <p:nvPr/>
+        </p:nvPicPr>
+        <p:blipFill>
+          <a:blip r:embed="rId1"/>
+          <a:stretch>
+            <a:fillRect/>
+          </a:stretch>
+        </p:blipFill>
+        <p:spPr>
+          <a:xfrm>
+            <a:off x="7523048" y="128016"/>
+            <a:ext cx="201168" cy="201168"/>
+          </a:xfrm>
+          <a:prstGeom prst="rect">
+            <a:avLst/>
+          </a:prstGeom>
+        </p:spPr>
+      </p:pic>
+      <p:sp>
+        <p:nvSpPr>
+          <p:cNvPr id="22" name="Text 19"/>
+          <p:cNvSpPr txBox="1"/>
+          <p:nvPr/>
+        </p:nvSpPr>
+        <p:spPr>
+          <a:xfrm>
+            <a:off x="7779080" y="91440"/>
+            <a:ext cx="3827399" cy="274320"/>
+          </a:xfrm>
+          <a:prstGeom prst="rect">
+            <a:avLst/>
+          </a:prstGeom>
+          <a:noFill/>
+          <a:ln/>
+        </p:spPr>
+        <p:txBody>
+          <a:bodyPr wrap="square" lIns="0" tIns="0" rIns="0" bIns="0" rtlCol="0" anchor="ctr"/>
+          <a:lstStyle/>
+          <a:p>
+            <a:pPr indent="0" marL="0">
+              <a:buNone/>
+            </a:pPr>
+            <a:r>
+              <a:rPr lang="en-US" sz="1100" b="1" dirty="0">
+                <a:solidFill>
+                  <a:srgbClr val="075985"/>
+                </a:solidFill>
+                <a:latin typeface="Calibri" pitchFamily="34" charset="0"/>
+                <a:ea typeface="Calibri" pitchFamily="34" charset="-122"/>
+                <a:cs typeface="Calibri" pitchFamily="34" charset="-120"/>
+              </a:rPr>
+              <a:t>DA COMPRENDERE OGGI</a:t>
+            </a:r>
+            <a:pPr indent="0" marL="0">
+              <a:buNone/>
+            </a:pPr>
+            <a:r>
+              <a:rPr lang="en-US" sz="1100" dirty="0">
+                <a:solidFill>
+                  <a:srgbClr val="075985"/>
+                </a:solidFill>
+                <a:latin typeface="Calibri" pitchFamily="34" charset="0"/>
+                <a:ea typeface="Calibri" pitchFamily="34" charset="-122"/>
+                <a:cs typeface="Calibri" pitchFamily="34" charset="-120"/>
+              </a:rPr>
+              <a:t> · accumulatore, pila, registri</a:t>
+            </a:r>
+            <a:endParaRPr lang="en-US" sz="1100" dirty="0"/>
+          </a:p>
+        </p:txBody>
+      </p:sp>
+      <p:sp>
+        <p:nvSpPr>
           <p:cNvPr id="25" name="Slide Number Placeholder 0"/>
           <p:cNvSpPr>
             <a:spLocks noGrp="1"/>
@@ -7090,6 +8220,133 @@
       </p:sp>
       <p:sp>
         <p:nvSpPr>
+          <p:cNvPr id="16" name="Shape 14"/>
+          <p:cNvSpPr/>
+          <p:nvPr/>
+        </p:nvSpPr>
+        <p:spPr>
+          <a:xfrm>
+            <a:off x="7395032" y="91440"/>
+            <a:ext cx="4248023" cy="274320"/>
+          </a:xfrm>
+          <a:prstGeom prst="rect">
+            <a:avLst/>
+          </a:prstGeom>
+          <a:solidFill>
+            <a:srgbClr val="E0F2FE"/>
+          </a:solidFill>
+          <a:ln w="12700">
+            <a:solidFill>
+              <a:srgbClr val="0369A1"/>
+            </a:solidFill>
+            <a:prstDash val="solid"/>
+          </a:ln>
+        </p:spPr>
+      </p:sp>
+      <p:sp>
+        <p:nvSpPr>
+          <p:cNvPr id="17" name="Shape 15"/>
+          <p:cNvSpPr/>
+          <p:nvPr/>
+        </p:nvSpPr>
+        <p:spPr>
+          <a:xfrm>
+            <a:off x="7395032" y="91440"/>
+            <a:ext cx="73152" cy="274320"/>
+          </a:xfrm>
+          <a:prstGeom prst="rect">
+            <a:avLst/>
+          </a:prstGeom>
+          <a:solidFill>
+            <a:srgbClr val="0369A1"/>
+          </a:solidFill>
+          <a:ln w="12700">
+            <a:solidFill>
+              <a:srgbClr val="0369A1"/>
+            </a:solidFill>
+            <a:prstDash val="solid"/>
+          </a:ln>
+        </p:spPr>
+      </p:sp>
+      <p:pic>
+        <p:nvPicPr>
+          <p:cNvPr id="18" name="Image 0" descr="preencoded.png">    </p:cNvPr>
+          <p:cNvPicPr>
+            <a:picLocks noChangeAspect="1"/>
+          </p:cNvPicPr>
+          <p:nvPr/>
+        </p:nvPicPr>
+        <p:blipFill>
+          <a:blip r:embed="rId1"/>
+          <a:stretch>
+            <a:fillRect/>
+          </a:stretch>
+        </p:blipFill>
+        <p:spPr>
+          <a:xfrm>
+            <a:off x="7523048" y="128016"/>
+            <a:ext cx="201168" cy="201168"/>
+          </a:xfrm>
+          <a:prstGeom prst="rect">
+            <a:avLst/>
+          </a:prstGeom>
+        </p:spPr>
+      </p:pic>
+      <p:sp>
+        <p:nvSpPr>
+          <p:cNvPr id="19" name="Text 16"/>
+          <p:cNvSpPr txBox="1"/>
+          <p:nvPr/>
+        </p:nvSpPr>
+        <p:spPr>
+          <a:xfrm>
+            <a:off x="7779080" y="91440"/>
+            <a:ext cx="3827399" cy="274320"/>
+          </a:xfrm>
+          <a:prstGeom prst="rect">
+            <a:avLst/>
+          </a:prstGeom>
+          <a:noFill/>
+          <a:ln/>
+        </p:spPr>
+        <p:txBody>
+          <a:bodyPr wrap="square" lIns="0" tIns="0" rIns="0" bIns="0" rtlCol="0" anchor="ctr"/>
+          <a:lstStyle/>
+          <a:p>
+            <a:pPr indent="0" marL="0">
+              <a:buNone/>
+            </a:pPr>
+            <a:r>
+              <a:rPr lang="en-US" sz="1100" b="1" dirty="0">
+                <a:solidFill>
+                  <a:srgbClr val="075985"/>
+                </a:solidFill>
+                <a:latin typeface="Calibri" pitchFamily="34" charset="0"/>
+                <a:ea typeface="Calibri" pitchFamily="34" charset="-122"/>
+                <a:cs typeface="Calibri" pitchFamily="34" charset="-120"/>
+              </a:rPr>
+              <a:t>DA COMPRENDERE OGGI</a:t>
+            </a:r>
+            <a:pPr indent="0" marL="0">
+              <a:buNone/>
+            </a:pPr>
+            <a:r>
+              <a:rPr lang="en-US" sz="1100" dirty="0">
+                <a:solidFill>
+                  <a:srgbClr val="075985"/>
+                </a:solidFill>
+                <a:latin typeface="Calibri" pitchFamily="34" charset="0"/>
+                <a:ea typeface="Calibri" pitchFamily="34" charset="-122"/>
+                <a:cs typeface="Calibri" pitchFamily="34" charset="-120"/>
+              </a:rPr>
+              <a:t> · accumulatore, pila, registri</a:t>
+            </a:r>
+            <a:endParaRPr lang="en-US" sz="1100" dirty="0"/>
+          </a:p>
+        </p:txBody>
+      </p:sp>
+      <p:sp>
+        <p:nvSpPr>
           <p:cNvPr id="25" name="Slide Number Placeholder 0"/>
           <p:cNvSpPr>
             <a:spLocks noGrp="1"/>
@@ -8079,6 +9336,133 @@
               <a:t>Accanto, fuori dal percorso principale: il banco dei registri di controllo e stato, e la logica delle trap della Lezione 19. Rispetto all'MC68000 della presentazione originale non ci sono registri dati e indirizzi separati, né registro dei codici di condizione, né registro dell'indirizzo effettivo.</a:t>
             </a:r>
             <a:endParaRPr lang="en-US" sz="1450" dirty="0"/>
+          </a:p>
+        </p:txBody>
+      </p:sp>
+      <p:sp>
+        <p:nvSpPr>
+          <p:cNvPr id="23" name="Shape 21"/>
+          <p:cNvSpPr/>
+          <p:nvPr/>
+        </p:nvSpPr>
+        <p:spPr>
+          <a:xfrm>
+            <a:off x="8051622" y="91440"/>
+            <a:ext cx="3591433" cy="274320"/>
+          </a:xfrm>
+          <a:prstGeom prst="rect">
+            <a:avLst/>
+          </a:prstGeom>
+          <a:solidFill>
+            <a:srgbClr val="E0F2FE"/>
+          </a:solidFill>
+          <a:ln w="12700">
+            <a:solidFill>
+              <a:srgbClr val="0369A1"/>
+            </a:solidFill>
+            <a:prstDash val="solid"/>
+          </a:ln>
+        </p:spPr>
+      </p:sp>
+      <p:sp>
+        <p:nvSpPr>
+          <p:cNvPr id="24" name="Shape 22"/>
+          <p:cNvSpPr/>
+          <p:nvPr/>
+        </p:nvSpPr>
+        <p:spPr>
+          <a:xfrm>
+            <a:off x="8051622" y="91440"/>
+            <a:ext cx="73152" cy="274320"/>
+          </a:xfrm>
+          <a:prstGeom prst="rect">
+            <a:avLst/>
+          </a:prstGeom>
+          <a:solidFill>
+            <a:srgbClr val="0369A1"/>
+          </a:solidFill>
+          <a:ln w="12700">
+            <a:solidFill>
+              <a:srgbClr val="0369A1"/>
+            </a:solidFill>
+            <a:prstDash val="solid"/>
+          </a:ln>
+        </p:spPr>
+      </p:sp>
+      <p:pic>
+        <p:nvPicPr>
+          <p:cNvPr id="25" name="Image 0" descr="preencoded.png">    </p:cNvPr>
+          <p:cNvPicPr>
+            <a:picLocks noChangeAspect="1"/>
+          </p:cNvPicPr>
+          <p:nvPr/>
+        </p:nvPicPr>
+        <p:blipFill>
+          <a:blip r:embed="rId1"/>
+          <a:stretch>
+            <a:fillRect/>
+          </a:stretch>
+        </p:blipFill>
+        <p:spPr>
+          <a:xfrm>
+            <a:off x="8179638" y="128016"/>
+            <a:ext cx="201168" cy="201168"/>
+          </a:xfrm>
+          <a:prstGeom prst="rect">
+            <a:avLst/>
+          </a:prstGeom>
+        </p:spPr>
+      </p:pic>
+      <p:sp>
+        <p:nvSpPr>
+          <p:cNvPr id="26" name="Text 23"/>
+          <p:cNvSpPr txBox="1"/>
+          <p:nvPr/>
+        </p:nvSpPr>
+        <p:spPr>
+          <a:xfrm>
+            <a:off x="8435670" y="91440"/>
+            <a:ext cx="3170809" cy="274320"/>
+          </a:xfrm>
+          <a:prstGeom prst="rect">
+            <a:avLst/>
+          </a:prstGeom>
+          <a:noFill/>
+          <a:ln/>
+        </p:spPr>
+        <p:txBody>
+          <a:bodyPr wrap="square" lIns="0" tIns="0" rIns="0" bIns="0" rtlCol="0" anchor="ctr"/>
+          <a:lstStyle/>
+          <a:p>
+            <a:pPr indent="0" marL="0">
+              <a:buNone/>
+            </a:pPr>
+            <a:r>
+              <a:rPr lang="en-US" sz="1100" b="1" dirty="0">
+                <a:solidFill>
+                  <a:srgbClr val="075985"/>
+                </a:solidFill>
+                <a:latin typeface="Calibri" pitchFamily="34" charset="0"/>
+                <a:ea typeface="Calibri" pitchFamily="34" charset="-122"/>
+                <a:cs typeface="Calibri" pitchFamily="34" charset="-120"/>
+              </a:rPr>
+              <a:t>DA COMPRENDERE OGGI</a:t>
+            </a:r>
+            <a:pPr indent="0" marL="0">
+              <a:buNone/>
+            </a:pPr>
+            <a:r>
+              <a:rPr lang="en-US" sz="1100" dirty="0">
+                <a:solidFill>
+                  <a:srgbClr val="075985"/>
+                </a:solidFill>
+                <a:latin typeface="Calibri" pitchFamily="34" charset="0"/>
+                <a:ea typeface="Calibri" pitchFamily="34" charset="-122"/>
+                <a:cs typeface="Calibri" pitchFamily="34" charset="-120"/>
+              </a:rPr>
+              <a:t> · il processore RV32</a:t>
+            </a:r>
+            <a:endParaRPr lang="en-US" sz="1100" dirty="0"/>
           </a:p>
         </p:txBody>
       </p:sp>
@@ -9330,6 +10714,133 @@
           </a:graphicData>
         </a:graphic>
       </p:graphicFrame>
+      <p:sp>
+        <p:nvSpPr>
+          <p:cNvPr id="4" name="Shape 1"/>
+          <p:cNvSpPr/>
+          <p:nvPr/>
+        </p:nvSpPr>
+        <p:spPr>
+          <a:xfrm>
+            <a:off x="8051622" y="91440"/>
+            <a:ext cx="3591433" cy="274320"/>
+          </a:xfrm>
+          <a:prstGeom prst="rect">
+            <a:avLst/>
+          </a:prstGeom>
+          <a:solidFill>
+            <a:srgbClr val="E0F2FE"/>
+          </a:solidFill>
+          <a:ln w="12700">
+            <a:solidFill>
+              <a:srgbClr val="0369A1"/>
+            </a:solidFill>
+            <a:prstDash val="solid"/>
+          </a:ln>
+        </p:spPr>
+      </p:sp>
+      <p:sp>
+        <p:nvSpPr>
+          <p:cNvPr id="5" name="Shape 2"/>
+          <p:cNvSpPr/>
+          <p:nvPr/>
+        </p:nvSpPr>
+        <p:spPr>
+          <a:xfrm>
+            <a:off x="8051622" y="91440"/>
+            <a:ext cx="73152" cy="274320"/>
+          </a:xfrm>
+          <a:prstGeom prst="rect">
+            <a:avLst/>
+          </a:prstGeom>
+          <a:solidFill>
+            <a:srgbClr val="0369A1"/>
+          </a:solidFill>
+          <a:ln w="12700">
+            <a:solidFill>
+              <a:srgbClr val="0369A1"/>
+            </a:solidFill>
+            <a:prstDash val="solid"/>
+          </a:ln>
+        </p:spPr>
+      </p:sp>
+      <p:pic>
+        <p:nvPicPr>
+          <p:cNvPr id="6" name="Image 0" descr="preencoded.png">    </p:cNvPr>
+          <p:cNvPicPr>
+            <a:picLocks noChangeAspect="1"/>
+          </p:cNvPicPr>
+          <p:nvPr/>
+        </p:nvPicPr>
+        <p:blipFill>
+          <a:blip r:embed="rId1"/>
+          <a:stretch>
+            <a:fillRect/>
+          </a:stretch>
+        </p:blipFill>
+        <p:spPr>
+          <a:xfrm>
+            <a:off x="8179638" y="128016"/>
+            <a:ext cx="201168" cy="201168"/>
+          </a:xfrm>
+          <a:prstGeom prst="rect">
+            <a:avLst/>
+          </a:prstGeom>
+        </p:spPr>
+      </p:pic>
+      <p:sp>
+        <p:nvSpPr>
+          <p:cNvPr id="7" name="Text 3"/>
+          <p:cNvSpPr txBox="1"/>
+          <p:nvPr/>
+        </p:nvSpPr>
+        <p:spPr>
+          <a:xfrm>
+            <a:off x="8435670" y="91440"/>
+            <a:ext cx="3170809" cy="274320"/>
+          </a:xfrm>
+          <a:prstGeom prst="rect">
+            <a:avLst/>
+          </a:prstGeom>
+          <a:noFill/>
+          <a:ln/>
+        </p:spPr>
+        <p:txBody>
+          <a:bodyPr wrap="square" lIns="0" tIns="0" rIns="0" bIns="0" rtlCol="0" anchor="ctr"/>
+          <a:lstStyle/>
+          <a:p>
+            <a:pPr indent="0" marL="0">
+              <a:buNone/>
+            </a:pPr>
+            <a:r>
+              <a:rPr lang="en-US" sz="1100" b="1" dirty="0">
+                <a:solidFill>
+                  <a:srgbClr val="075985"/>
+                </a:solidFill>
+                <a:latin typeface="Calibri" pitchFamily="34" charset="0"/>
+                <a:ea typeface="Calibri" pitchFamily="34" charset="-122"/>
+                <a:cs typeface="Calibri" pitchFamily="34" charset="-120"/>
+              </a:rPr>
+              <a:t>DA COMPRENDERE OGGI</a:t>
+            </a:r>
+            <a:pPr indent="0" marL="0">
+              <a:buNone/>
+            </a:pPr>
+            <a:r>
+              <a:rPr lang="en-US" sz="1100" dirty="0">
+                <a:solidFill>
+                  <a:srgbClr val="075985"/>
+                </a:solidFill>
+                <a:latin typeface="Calibri" pitchFamily="34" charset="0"/>
+                <a:ea typeface="Calibri" pitchFamily="34" charset="-122"/>
+                <a:cs typeface="Calibri" pitchFamily="34" charset="-120"/>
+              </a:rPr>
+              <a:t> · il processore RV32</a:t>
+            </a:r>
+            <a:endParaRPr lang="en-US" sz="1100" dirty="0"/>
+          </a:p>
+        </p:txBody>
+      </p:sp>
       <p:sp>
         <p:nvSpPr>
           <p:cNvPr id="25" name="Slide Number Placeholder 0"/>
@@ -15387,6 +16898,133 @@
       </p:sp>
       <p:sp>
         <p:nvSpPr>
+          <p:cNvPr id="18" name="Shape 16"/>
+          <p:cNvSpPr/>
+          <p:nvPr/>
+        </p:nvSpPr>
+        <p:spPr>
+          <a:xfrm>
+            <a:off x="7592009" y="91440"/>
+            <a:ext cx="4051046" cy="274320"/>
+          </a:xfrm>
+          <a:prstGeom prst="rect">
+            <a:avLst/>
+          </a:prstGeom>
+          <a:solidFill>
+            <a:srgbClr val="E0F2FE"/>
+          </a:solidFill>
+          <a:ln w="12700">
+            <a:solidFill>
+              <a:srgbClr val="0369A1"/>
+            </a:solidFill>
+            <a:prstDash val="solid"/>
+          </a:ln>
+        </p:spPr>
+      </p:sp>
+      <p:sp>
+        <p:nvSpPr>
+          <p:cNvPr id="19" name="Shape 17"/>
+          <p:cNvSpPr/>
+          <p:nvPr/>
+        </p:nvSpPr>
+        <p:spPr>
+          <a:xfrm>
+            <a:off x="7592009" y="91440"/>
+            <a:ext cx="73152" cy="274320"/>
+          </a:xfrm>
+          <a:prstGeom prst="rect">
+            <a:avLst/>
+          </a:prstGeom>
+          <a:solidFill>
+            <a:srgbClr val="0369A1"/>
+          </a:solidFill>
+          <a:ln w="12700">
+            <a:solidFill>
+              <a:srgbClr val="0369A1"/>
+            </a:solidFill>
+            <a:prstDash val="solid"/>
+          </a:ln>
+        </p:spPr>
+      </p:sp>
+      <p:pic>
+        <p:nvPicPr>
+          <p:cNvPr id="20" name="Image 0" descr="preencoded.png">    </p:cNvPr>
+          <p:cNvPicPr>
+            <a:picLocks noChangeAspect="1"/>
+          </p:cNvPicPr>
+          <p:nvPr/>
+        </p:nvPicPr>
+        <p:blipFill>
+          <a:blip r:embed="rId1"/>
+          <a:stretch>
+            <a:fillRect/>
+          </a:stretch>
+        </p:blipFill>
+        <p:spPr>
+          <a:xfrm>
+            <a:off x="7720025" y="128016"/>
+            <a:ext cx="201168" cy="201168"/>
+          </a:xfrm>
+          <a:prstGeom prst="rect">
+            <a:avLst/>
+          </a:prstGeom>
+        </p:spPr>
+      </p:pic>
+      <p:sp>
+        <p:nvSpPr>
+          <p:cNvPr id="21" name="Text 18"/>
+          <p:cNvSpPr txBox="1"/>
+          <p:nvPr/>
+        </p:nvSpPr>
+        <p:spPr>
+          <a:xfrm>
+            <a:off x="7976057" y="91440"/>
+            <a:ext cx="3630422" cy="274320"/>
+          </a:xfrm>
+          <a:prstGeom prst="rect">
+            <a:avLst/>
+          </a:prstGeom>
+          <a:noFill/>
+          <a:ln/>
+        </p:spPr>
+        <p:txBody>
+          <a:bodyPr wrap="square" lIns="0" tIns="0" rIns="0" bIns="0" rtlCol="0" anchor="ctr"/>
+          <a:lstStyle/>
+          <a:p>
+            <a:pPr indent="0" marL="0">
+              <a:buNone/>
+            </a:pPr>
+            <a:r>
+              <a:rPr lang="en-US" sz="1100" b="1" dirty="0">
+                <a:solidFill>
+                  <a:srgbClr val="075985"/>
+                </a:solidFill>
+                <a:latin typeface="Calibri" pitchFamily="34" charset="0"/>
+                <a:ea typeface="Calibri" pitchFamily="34" charset="-122"/>
+                <a:cs typeface="Calibri" pitchFamily="34" charset="-120"/>
+              </a:rPr>
+              <a:t>DA COMPRENDERE OGGI</a:t>
+            </a:r>
+            <a:pPr indent="0" marL="0">
+              <a:buNone/>
+            </a:pPr>
+            <a:r>
+              <a:rPr lang="en-US" sz="1100" dirty="0">
+                <a:solidFill>
+                  <a:srgbClr val="075985"/>
+                </a:solidFill>
+                <a:latin typeface="Calibri" pitchFamily="34" charset="0"/>
+                <a:ea typeface="Calibri" pitchFamily="34" charset="-122"/>
+                <a:cs typeface="Calibri" pitchFamily="34" charset="-120"/>
+              </a:rPr>
+              <a:t> · il modello del processore</a:t>
+            </a:r>
+            <a:endParaRPr lang="en-US" sz="1100" dirty="0"/>
+          </a:p>
+        </p:txBody>
+      </p:sp>
+      <p:sp>
+        <p:nvSpPr>
           <p:cNvPr id="25" name="Slide Number Placeholder 0"/>
           <p:cNvSpPr>
             <a:spLocks noGrp="1"/>
@@ -16879,6 +18517,133 @@
               <a:t>– registri di transito RI e RU</a:t>
             </a:r>
             <a:endParaRPr lang="en-US" sz="1700" dirty="0"/>
+          </a:p>
+        </p:txBody>
+      </p:sp>
+      <p:sp>
+        <p:nvSpPr>
+          <p:cNvPr id="34" name="Shape 32"/>
+          <p:cNvSpPr/>
+          <p:nvPr/>
+        </p:nvSpPr>
+        <p:spPr>
+          <a:xfrm>
+            <a:off x="7592009" y="91440"/>
+            <a:ext cx="4051046" cy="274320"/>
+          </a:xfrm>
+          <a:prstGeom prst="rect">
+            <a:avLst/>
+          </a:prstGeom>
+          <a:solidFill>
+            <a:srgbClr val="E0F2FE"/>
+          </a:solidFill>
+          <a:ln w="12700">
+            <a:solidFill>
+              <a:srgbClr val="0369A1"/>
+            </a:solidFill>
+            <a:prstDash val="solid"/>
+          </a:ln>
+        </p:spPr>
+      </p:sp>
+      <p:sp>
+        <p:nvSpPr>
+          <p:cNvPr id="35" name="Shape 33"/>
+          <p:cNvSpPr/>
+          <p:nvPr/>
+        </p:nvSpPr>
+        <p:spPr>
+          <a:xfrm>
+            <a:off x="7592009" y="91440"/>
+            <a:ext cx="73152" cy="274320"/>
+          </a:xfrm>
+          <a:prstGeom prst="rect">
+            <a:avLst/>
+          </a:prstGeom>
+          <a:solidFill>
+            <a:srgbClr val="0369A1"/>
+          </a:solidFill>
+          <a:ln w="12700">
+            <a:solidFill>
+              <a:srgbClr val="0369A1"/>
+            </a:solidFill>
+            <a:prstDash val="solid"/>
+          </a:ln>
+        </p:spPr>
+      </p:sp>
+      <p:pic>
+        <p:nvPicPr>
+          <p:cNvPr id="36" name="Image 0" descr="preencoded.png">    </p:cNvPr>
+          <p:cNvPicPr>
+            <a:picLocks noChangeAspect="1"/>
+          </p:cNvPicPr>
+          <p:nvPr/>
+        </p:nvPicPr>
+        <p:blipFill>
+          <a:blip r:embed="rId1"/>
+          <a:stretch>
+            <a:fillRect/>
+          </a:stretch>
+        </p:blipFill>
+        <p:spPr>
+          <a:xfrm>
+            <a:off x="7720025" y="128016"/>
+            <a:ext cx="201168" cy="201168"/>
+          </a:xfrm>
+          <a:prstGeom prst="rect">
+            <a:avLst/>
+          </a:prstGeom>
+        </p:spPr>
+      </p:pic>
+      <p:sp>
+        <p:nvSpPr>
+          <p:cNvPr id="37" name="Text 34"/>
+          <p:cNvSpPr txBox="1"/>
+          <p:nvPr/>
+        </p:nvSpPr>
+        <p:spPr>
+          <a:xfrm>
+            <a:off x="7976057" y="91440"/>
+            <a:ext cx="3630422" cy="274320"/>
+          </a:xfrm>
+          <a:prstGeom prst="rect">
+            <a:avLst/>
+          </a:prstGeom>
+          <a:noFill/>
+          <a:ln/>
+        </p:spPr>
+        <p:txBody>
+          <a:bodyPr wrap="square" lIns="0" tIns="0" rIns="0" bIns="0" rtlCol="0" anchor="ctr"/>
+          <a:lstStyle/>
+          <a:p>
+            <a:pPr indent="0" marL="0">
+              <a:buNone/>
+            </a:pPr>
+            <a:r>
+              <a:rPr lang="en-US" sz="1100" b="1" dirty="0">
+                <a:solidFill>
+                  <a:srgbClr val="075985"/>
+                </a:solidFill>
+                <a:latin typeface="Calibri" pitchFamily="34" charset="0"/>
+                <a:ea typeface="Calibri" pitchFamily="34" charset="-122"/>
+                <a:cs typeface="Calibri" pitchFamily="34" charset="-120"/>
+              </a:rPr>
+              <a:t>DA COMPRENDERE OGGI</a:t>
+            </a:r>
+            <a:pPr indent="0" marL="0">
+              <a:buNone/>
+            </a:pPr>
+            <a:r>
+              <a:rPr lang="en-US" sz="1100" dirty="0">
+                <a:solidFill>
+                  <a:srgbClr val="075985"/>
+                </a:solidFill>
+                <a:latin typeface="Calibri" pitchFamily="34" charset="0"/>
+                <a:ea typeface="Calibri" pitchFamily="34" charset="-122"/>
+                <a:cs typeface="Calibri" pitchFamily="34" charset="-120"/>
+              </a:rPr>
+              <a:t> · il modello del processore</a:t>
+            </a:r>
+            <a:endParaRPr lang="en-US" sz="1100" dirty="0"/>
           </a:p>
         </p:txBody>
       </p:sp>
@@ -18883,6 +20648,133 @@
       </p:graphicFrame>
       <p:sp>
         <p:nvSpPr>
+          <p:cNvPr id="4" name="Shape 1"/>
+          <p:cNvSpPr/>
+          <p:nvPr/>
+        </p:nvSpPr>
+        <p:spPr>
+          <a:xfrm>
+            <a:off x="7592009" y="91440"/>
+            <a:ext cx="4051046" cy="274320"/>
+          </a:xfrm>
+          <a:prstGeom prst="rect">
+            <a:avLst/>
+          </a:prstGeom>
+          <a:solidFill>
+            <a:srgbClr val="E0F2FE"/>
+          </a:solidFill>
+          <a:ln w="12700">
+            <a:solidFill>
+              <a:srgbClr val="0369A1"/>
+            </a:solidFill>
+            <a:prstDash val="solid"/>
+          </a:ln>
+        </p:spPr>
+      </p:sp>
+      <p:sp>
+        <p:nvSpPr>
+          <p:cNvPr id="5" name="Shape 2"/>
+          <p:cNvSpPr/>
+          <p:nvPr/>
+        </p:nvSpPr>
+        <p:spPr>
+          <a:xfrm>
+            <a:off x="7592009" y="91440"/>
+            <a:ext cx="73152" cy="274320"/>
+          </a:xfrm>
+          <a:prstGeom prst="rect">
+            <a:avLst/>
+          </a:prstGeom>
+          <a:solidFill>
+            <a:srgbClr val="0369A1"/>
+          </a:solidFill>
+          <a:ln w="12700">
+            <a:solidFill>
+              <a:srgbClr val="0369A1"/>
+            </a:solidFill>
+            <a:prstDash val="solid"/>
+          </a:ln>
+        </p:spPr>
+      </p:sp>
+      <p:pic>
+        <p:nvPicPr>
+          <p:cNvPr id="6" name="Image 0" descr="preencoded.png">    </p:cNvPr>
+          <p:cNvPicPr>
+            <a:picLocks noChangeAspect="1"/>
+          </p:cNvPicPr>
+          <p:nvPr/>
+        </p:nvPicPr>
+        <p:blipFill>
+          <a:blip r:embed="rId1"/>
+          <a:stretch>
+            <a:fillRect/>
+          </a:stretch>
+        </p:blipFill>
+        <p:spPr>
+          <a:xfrm>
+            <a:off x="7720025" y="128016"/>
+            <a:ext cx="201168" cy="201168"/>
+          </a:xfrm>
+          <a:prstGeom prst="rect">
+            <a:avLst/>
+          </a:prstGeom>
+        </p:spPr>
+      </p:pic>
+      <p:sp>
+        <p:nvSpPr>
+          <p:cNvPr id="7" name="Text 3"/>
+          <p:cNvSpPr txBox="1"/>
+          <p:nvPr/>
+        </p:nvSpPr>
+        <p:spPr>
+          <a:xfrm>
+            <a:off x="7976057" y="91440"/>
+            <a:ext cx="3630422" cy="274320"/>
+          </a:xfrm>
+          <a:prstGeom prst="rect">
+            <a:avLst/>
+          </a:prstGeom>
+          <a:noFill/>
+          <a:ln/>
+        </p:spPr>
+        <p:txBody>
+          <a:bodyPr wrap="square" lIns="0" tIns="0" rIns="0" bIns="0" rtlCol="0" anchor="ctr"/>
+          <a:lstStyle/>
+          <a:p>
+            <a:pPr indent="0" marL="0">
+              <a:buNone/>
+            </a:pPr>
+            <a:r>
+              <a:rPr lang="en-US" sz="1100" b="1" dirty="0">
+                <a:solidFill>
+                  <a:srgbClr val="075985"/>
+                </a:solidFill>
+                <a:latin typeface="Calibri" pitchFamily="34" charset="0"/>
+                <a:ea typeface="Calibri" pitchFamily="34" charset="-122"/>
+                <a:cs typeface="Calibri" pitchFamily="34" charset="-120"/>
+              </a:rPr>
+              <a:t>DA COMPRENDERE OGGI</a:t>
+            </a:r>
+            <a:pPr indent="0" marL="0">
+              <a:buNone/>
+            </a:pPr>
+            <a:r>
+              <a:rPr lang="en-US" sz="1100" dirty="0">
+                <a:solidFill>
+                  <a:srgbClr val="075985"/>
+                </a:solidFill>
+                <a:latin typeface="Calibri" pitchFamily="34" charset="0"/>
+                <a:ea typeface="Calibri" pitchFamily="34" charset="-122"/>
+                <a:cs typeface="Calibri" pitchFamily="34" charset="-120"/>
+              </a:rPr>
+              <a:t> · il modello del processore</a:t>
+            </a:r>
+            <a:endParaRPr lang="en-US" sz="1100" dirty="0"/>
+          </a:p>
+        </p:txBody>
+      </p:sp>
+      <p:sp>
+        <p:nvSpPr>
           <p:cNvPr id="25" name="Slide Number Placeholder 0"/>
           <p:cNvSpPr>
             <a:spLocks noGrp="1"/>
@@ -19445,6 +21337,133 @@
               <a:t>registri di 32 bit, indirizzi di 32 bit, istruzioni di 32 bit</a:t>
             </a:r>
             <a:endParaRPr lang="en-US" sz="1900" dirty="0"/>
+          </a:p>
+        </p:txBody>
+      </p:sp>
+      <p:sp>
+        <p:nvSpPr>
+          <p:cNvPr id="14" name="Shape 12"/>
+          <p:cNvSpPr/>
+          <p:nvPr/>
+        </p:nvSpPr>
+        <p:spPr>
+          <a:xfrm>
+            <a:off x="7592009" y="91440"/>
+            <a:ext cx="4051046" cy="274320"/>
+          </a:xfrm>
+          <a:prstGeom prst="rect">
+            <a:avLst/>
+          </a:prstGeom>
+          <a:solidFill>
+            <a:srgbClr val="E0F2FE"/>
+          </a:solidFill>
+          <a:ln w="12700">
+            <a:solidFill>
+              <a:srgbClr val="0369A1"/>
+            </a:solidFill>
+            <a:prstDash val="solid"/>
+          </a:ln>
+        </p:spPr>
+      </p:sp>
+      <p:sp>
+        <p:nvSpPr>
+          <p:cNvPr id="15" name="Shape 13"/>
+          <p:cNvSpPr/>
+          <p:nvPr/>
+        </p:nvSpPr>
+        <p:spPr>
+          <a:xfrm>
+            <a:off x="7592009" y="91440"/>
+            <a:ext cx="73152" cy="274320"/>
+          </a:xfrm>
+          <a:prstGeom prst="rect">
+            <a:avLst/>
+          </a:prstGeom>
+          <a:solidFill>
+            <a:srgbClr val="0369A1"/>
+          </a:solidFill>
+          <a:ln w="12700">
+            <a:solidFill>
+              <a:srgbClr val="0369A1"/>
+            </a:solidFill>
+            <a:prstDash val="solid"/>
+          </a:ln>
+        </p:spPr>
+      </p:sp>
+      <p:pic>
+        <p:nvPicPr>
+          <p:cNvPr id="16" name="Image 0" descr="preencoded.png">    </p:cNvPr>
+          <p:cNvPicPr>
+            <a:picLocks noChangeAspect="1"/>
+          </p:cNvPicPr>
+          <p:nvPr/>
+        </p:nvPicPr>
+        <p:blipFill>
+          <a:blip r:embed="rId1"/>
+          <a:stretch>
+            <a:fillRect/>
+          </a:stretch>
+        </p:blipFill>
+        <p:spPr>
+          <a:xfrm>
+            <a:off x="7720025" y="128016"/>
+            <a:ext cx="201168" cy="201168"/>
+          </a:xfrm>
+          <a:prstGeom prst="rect">
+            <a:avLst/>
+          </a:prstGeom>
+        </p:spPr>
+      </p:pic>
+      <p:sp>
+        <p:nvSpPr>
+          <p:cNvPr id="17" name="Text 14"/>
+          <p:cNvSpPr txBox="1"/>
+          <p:nvPr/>
+        </p:nvSpPr>
+        <p:spPr>
+          <a:xfrm>
+            <a:off x="7976057" y="91440"/>
+            <a:ext cx="3630422" cy="274320"/>
+          </a:xfrm>
+          <a:prstGeom prst="rect">
+            <a:avLst/>
+          </a:prstGeom>
+          <a:noFill/>
+          <a:ln/>
+        </p:spPr>
+        <p:txBody>
+          <a:bodyPr wrap="square" lIns="0" tIns="0" rIns="0" bIns="0" rtlCol="0" anchor="ctr"/>
+          <a:lstStyle/>
+          <a:p>
+            <a:pPr indent="0" marL="0">
+              <a:buNone/>
+            </a:pPr>
+            <a:r>
+              <a:rPr lang="en-US" sz="1100" b="1" dirty="0">
+                <a:solidFill>
+                  <a:srgbClr val="075985"/>
+                </a:solidFill>
+                <a:latin typeface="Calibri" pitchFamily="34" charset="0"/>
+                <a:ea typeface="Calibri" pitchFamily="34" charset="-122"/>
+                <a:cs typeface="Calibri" pitchFamily="34" charset="-120"/>
+              </a:rPr>
+              <a:t>DA COMPRENDERE OGGI</a:t>
+            </a:r>
+            <a:pPr indent="0" marL="0">
+              <a:buNone/>
+            </a:pPr>
+            <a:r>
+              <a:rPr lang="en-US" sz="1100" dirty="0">
+                <a:solidFill>
+                  <a:srgbClr val="075985"/>
+                </a:solidFill>
+                <a:latin typeface="Calibri" pitchFamily="34" charset="0"/>
+                <a:ea typeface="Calibri" pitchFamily="34" charset="-122"/>
+                <a:cs typeface="Calibri" pitchFamily="34" charset="-120"/>
+              </a:rPr>
+              <a:t> · il modello del processore</a:t>
+            </a:r>
+            <a:endParaRPr lang="en-US" sz="1100" dirty="0"/>
           </a:p>
         </p:txBody>
       </p:sp>
@@ -20457,6 +22476,324 @@
       </p:sp>
       <p:sp>
         <p:nvSpPr>
+          <p:cNvPr id="5" name="Shape 2"/>
+          <p:cNvSpPr/>
+          <p:nvPr/>
+        </p:nvSpPr>
+        <p:spPr>
+          <a:xfrm>
+            <a:off x="6503746" y="91440"/>
+            <a:ext cx="5139309" cy="274320"/>
+          </a:xfrm>
+          <a:prstGeom prst="rect">
+            <a:avLst/>
+          </a:prstGeom>
+          <a:solidFill>
+            <a:srgbClr val="F3E8FF"/>
+          </a:solidFill>
+          <a:ln w="12700">
+            <a:solidFill>
+              <a:srgbClr val="7E22CE"/>
+            </a:solidFill>
+            <a:prstDash val="dash"/>
+          </a:ln>
+        </p:spPr>
+      </p:sp>
+      <p:sp>
+        <p:nvSpPr>
+          <p:cNvPr id="6" name="Shape 3"/>
+          <p:cNvSpPr/>
+          <p:nvPr/>
+        </p:nvSpPr>
+        <p:spPr>
+          <a:xfrm>
+            <a:off x="6531178" y="128016"/>
+            <a:ext cx="45720" cy="45720"/>
+          </a:xfrm>
+          <a:prstGeom prst="rect">
+            <a:avLst/>
+          </a:prstGeom>
+          <a:solidFill>
+            <a:srgbClr val="7E22CE"/>
+          </a:solidFill>
+          <a:ln w="12700">
+            <a:solidFill>
+              <a:srgbClr val="7E22CE"/>
+            </a:solidFill>
+            <a:prstDash val="solid"/>
+          </a:ln>
+        </p:spPr>
+      </p:sp>
+      <p:sp>
+        <p:nvSpPr>
+          <p:cNvPr id="7" name="Shape 4"/>
+          <p:cNvSpPr/>
+          <p:nvPr/>
+        </p:nvSpPr>
+        <p:spPr>
+          <a:xfrm>
+            <a:off x="6531178" y="205740"/>
+            <a:ext cx="45720" cy="45720"/>
+          </a:xfrm>
+          <a:prstGeom prst="rect">
+            <a:avLst/>
+          </a:prstGeom>
+          <a:solidFill>
+            <a:srgbClr val="7E22CE"/>
+          </a:solidFill>
+          <a:ln w="12700">
+            <a:solidFill>
+              <a:srgbClr val="7E22CE"/>
+            </a:solidFill>
+            <a:prstDash val="solid"/>
+          </a:ln>
+        </p:spPr>
+      </p:sp>
+      <p:sp>
+        <p:nvSpPr>
+          <p:cNvPr id="8" name="Shape 5"/>
+          <p:cNvSpPr/>
+          <p:nvPr/>
+        </p:nvSpPr>
+        <p:spPr>
+          <a:xfrm>
+            <a:off x="6531178" y="283464"/>
+            <a:ext cx="45720" cy="45720"/>
+          </a:xfrm>
+          <a:prstGeom prst="rect">
+            <a:avLst/>
+          </a:prstGeom>
+          <a:solidFill>
+            <a:srgbClr val="7E22CE"/>
+          </a:solidFill>
+          <a:ln w="12700">
+            <a:solidFill>
+              <a:srgbClr val="7E22CE"/>
+            </a:solidFill>
+            <a:prstDash val="solid"/>
+          </a:ln>
+        </p:spPr>
+      </p:sp>
+      <p:pic>
+        <p:nvPicPr>
+          <p:cNvPr id="9" name="Image 0" descr="preencoded.png">    </p:cNvPr>
+          <p:cNvPicPr>
+            <a:picLocks noChangeAspect="1"/>
+          </p:cNvPicPr>
+          <p:nvPr/>
+        </p:nvPicPr>
+        <p:blipFill>
+          <a:blip r:embed="rId1"/>
+          <a:stretch>
+            <a:fillRect/>
+          </a:stretch>
+        </p:blipFill>
+        <p:spPr>
+          <a:xfrm>
+            <a:off x="6631762" y="128016"/>
+            <a:ext cx="201168" cy="201168"/>
+          </a:xfrm>
+          <a:prstGeom prst="rect">
+            <a:avLst/>
+          </a:prstGeom>
+        </p:spPr>
+      </p:pic>
+      <p:sp>
+        <p:nvSpPr>
+          <p:cNvPr id="10" name="Text 6"/>
+          <p:cNvSpPr txBox="1"/>
+          <p:nvPr/>
+        </p:nvSpPr>
+        <p:spPr>
+          <a:xfrm>
+            <a:off x="6887794" y="91440"/>
+            <a:ext cx="4718685" cy="274320"/>
+          </a:xfrm>
+          <a:prstGeom prst="rect">
+            <a:avLst/>
+          </a:prstGeom>
+          <a:noFill/>
+          <a:ln/>
+        </p:spPr>
+        <p:txBody>
+          <a:bodyPr wrap="square" lIns="0" tIns="0" rIns="0" bIns="0" rtlCol="0" anchor="ctr"/>
+          <a:lstStyle/>
+          <a:p>
+            <a:pPr indent="0" marL="0">
+              <a:buNone/>
+            </a:pPr>
+            <a:r>
+              <a:rPr lang="en-US" sz="1100" b="1" dirty="0">
+                <a:solidFill>
+                  <a:srgbClr val="6B21A8"/>
+                </a:solidFill>
+                <a:latin typeface="Calibri" pitchFamily="34" charset="0"/>
+                <a:ea typeface="Calibri" pitchFamily="34" charset="-122"/>
+                <a:cs typeface="Calibri" pitchFamily="34" charset="-120"/>
+              </a:rPr>
+              <a:t>DA COMPRENDERE PIÙ AVANTI</a:t>
+            </a:r>
+            <a:pPr indent="0" marL="0">
+              <a:buNone/>
+            </a:pPr>
+            <a:r>
+              <a:rPr lang="en-US" sz="1100" dirty="0">
+                <a:solidFill>
+                  <a:srgbClr val="6B21A8"/>
+                </a:solidFill>
+                <a:latin typeface="Calibri" pitchFamily="34" charset="0"/>
+                <a:ea typeface="Calibri" pitchFamily="34" charset="-122"/>
+                <a:cs typeface="Calibri" pitchFamily="34" charset="-120"/>
+              </a:rPr>
+              <a:t> · interruzioni e trap</a:t>
+            </a:r>
+            <a:pPr indent="0" marL="0">
+              <a:buNone/>
+            </a:pPr>
+            <a:r>
+              <a:rPr lang="en-US" sz="1100" b="1" dirty="0">
+                <a:solidFill>
+                  <a:srgbClr val="6B21A8"/>
+                </a:solidFill>
+                <a:latin typeface="Calibri" pitchFamily="34" charset="0"/>
+                <a:ea typeface="Calibri" pitchFamily="34" charset="-122"/>
+                <a:cs typeface="Calibri" pitchFamily="34" charset="-120"/>
+              </a:rPr>
+              <a:t> → Lezione 19</a:t>
+            </a:r>
+            <a:endParaRPr lang="en-US" sz="1100" dirty="0"/>
+          </a:p>
+        </p:txBody>
+      </p:sp>
+      <p:sp>
+        <p:nvSpPr>
+          <p:cNvPr id="11" name="Shape 7"/>
+          <p:cNvSpPr/>
+          <p:nvPr/>
+        </p:nvSpPr>
+        <p:spPr>
+          <a:xfrm>
+            <a:off x="2342972" y="91440"/>
+            <a:ext cx="4051046" cy="274320"/>
+          </a:xfrm>
+          <a:prstGeom prst="rect">
+            <a:avLst/>
+          </a:prstGeom>
+          <a:solidFill>
+            <a:srgbClr val="E0F2FE"/>
+          </a:solidFill>
+          <a:ln w="12700">
+            <a:solidFill>
+              <a:srgbClr val="0369A1"/>
+            </a:solidFill>
+            <a:prstDash val="solid"/>
+          </a:ln>
+        </p:spPr>
+      </p:sp>
+      <p:sp>
+        <p:nvSpPr>
+          <p:cNvPr id="12" name="Shape 8"/>
+          <p:cNvSpPr/>
+          <p:nvPr/>
+        </p:nvSpPr>
+        <p:spPr>
+          <a:xfrm>
+            <a:off x="2342972" y="91440"/>
+            <a:ext cx="73152" cy="274320"/>
+          </a:xfrm>
+          <a:prstGeom prst="rect">
+            <a:avLst/>
+          </a:prstGeom>
+          <a:solidFill>
+            <a:srgbClr val="0369A1"/>
+          </a:solidFill>
+          <a:ln w="12700">
+            <a:solidFill>
+              <a:srgbClr val="0369A1"/>
+            </a:solidFill>
+            <a:prstDash val="solid"/>
+          </a:ln>
+        </p:spPr>
+      </p:sp>
+      <p:pic>
+        <p:nvPicPr>
+          <p:cNvPr id="13" name="Image 1" descr="preencoded.png">    </p:cNvPr>
+          <p:cNvPicPr>
+            <a:picLocks noChangeAspect="1"/>
+          </p:cNvPicPr>
+          <p:nvPr/>
+        </p:nvPicPr>
+        <p:blipFill>
+          <a:blip r:embed="rId2"/>
+          <a:stretch>
+            <a:fillRect/>
+          </a:stretch>
+        </p:blipFill>
+        <p:spPr>
+          <a:xfrm>
+            <a:off x="2470988" y="128016"/>
+            <a:ext cx="201168" cy="201168"/>
+          </a:xfrm>
+          <a:prstGeom prst="rect">
+            <a:avLst/>
+          </a:prstGeom>
+        </p:spPr>
+      </p:pic>
+      <p:sp>
+        <p:nvSpPr>
+          <p:cNvPr id="14" name="Text 9"/>
+          <p:cNvSpPr txBox="1"/>
+          <p:nvPr/>
+        </p:nvSpPr>
+        <p:spPr>
+          <a:xfrm>
+            <a:off x="2727020" y="91440"/>
+            <a:ext cx="3630422" cy="274320"/>
+          </a:xfrm>
+          <a:prstGeom prst="rect">
+            <a:avLst/>
+          </a:prstGeom>
+          <a:noFill/>
+          <a:ln/>
+        </p:spPr>
+        <p:txBody>
+          <a:bodyPr wrap="square" lIns="0" tIns="0" rIns="0" bIns="0" rtlCol="0" anchor="ctr"/>
+          <a:lstStyle/>
+          <a:p>
+            <a:pPr indent="0" marL="0">
+              <a:buNone/>
+            </a:pPr>
+            <a:r>
+              <a:rPr lang="en-US" sz="1100" b="1" dirty="0">
+                <a:solidFill>
+                  <a:srgbClr val="075985"/>
+                </a:solidFill>
+                <a:latin typeface="Calibri" pitchFamily="34" charset="0"/>
+                <a:ea typeface="Calibri" pitchFamily="34" charset="-122"/>
+                <a:cs typeface="Calibri" pitchFamily="34" charset="-120"/>
+              </a:rPr>
+              <a:t>DA COMPRENDERE OGGI</a:t>
+            </a:r>
+            <a:pPr indent="0" marL="0">
+              <a:buNone/>
+            </a:pPr>
+            <a:r>
+              <a:rPr lang="en-US" sz="1100" dirty="0">
+                <a:solidFill>
+                  <a:srgbClr val="075985"/>
+                </a:solidFill>
+                <a:latin typeface="Calibri" pitchFamily="34" charset="0"/>
+                <a:ea typeface="Calibri" pitchFamily="34" charset="-122"/>
+                <a:cs typeface="Calibri" pitchFamily="34" charset="-120"/>
+              </a:rPr>
+              <a:t> · il modello del processore</a:t>
+            </a:r>
+            <a:endParaRPr lang="en-US" sz="1100" dirty="0"/>
+          </a:p>
+        </p:txBody>
+      </p:sp>
+      <p:sp>
+        <p:nvSpPr>
           <p:cNvPr id="25" name="Slide Number Placeholder 0"/>
           <p:cNvSpPr>
             <a:spLocks noGrp="1"/>
@@ -21021,6 +23358,133 @@
               <a:t>– prodotti durante l'esecuzione di un'istruzione, possono condizionare le successive</a:t>
             </a:r>
             <a:endParaRPr lang="en-US" sz="2100" dirty="0"/>
+          </a:p>
+        </p:txBody>
+      </p:sp>
+      <p:sp>
+        <p:nvSpPr>
+          <p:cNvPr id="13" name="Shape 11"/>
+          <p:cNvSpPr/>
+          <p:nvPr/>
+        </p:nvSpPr>
+        <p:spPr>
+          <a:xfrm>
+            <a:off x="7920304" y="91440"/>
+            <a:ext cx="3722751" cy="274320"/>
+          </a:xfrm>
+          <a:prstGeom prst="rect">
+            <a:avLst/>
+          </a:prstGeom>
+          <a:solidFill>
+            <a:srgbClr val="E0F2FE"/>
+          </a:solidFill>
+          <a:ln w="12700">
+            <a:solidFill>
+              <a:srgbClr val="0369A1"/>
+            </a:solidFill>
+            <a:prstDash val="solid"/>
+          </a:ln>
+        </p:spPr>
+      </p:sp>
+      <p:sp>
+        <p:nvSpPr>
+          <p:cNvPr id="14" name="Shape 12"/>
+          <p:cNvSpPr/>
+          <p:nvPr/>
+        </p:nvSpPr>
+        <p:spPr>
+          <a:xfrm>
+            <a:off x="7920304" y="91440"/>
+            <a:ext cx="73152" cy="274320"/>
+          </a:xfrm>
+          <a:prstGeom prst="rect">
+            <a:avLst/>
+          </a:prstGeom>
+          <a:solidFill>
+            <a:srgbClr val="0369A1"/>
+          </a:solidFill>
+          <a:ln w="12700">
+            <a:solidFill>
+              <a:srgbClr val="0369A1"/>
+            </a:solidFill>
+            <a:prstDash val="solid"/>
+          </a:ln>
+        </p:spPr>
+      </p:sp>
+      <p:pic>
+        <p:nvPicPr>
+          <p:cNvPr id="15" name="Image 0" descr="preencoded.png">    </p:cNvPr>
+          <p:cNvPicPr>
+            <a:picLocks noChangeAspect="1"/>
+          </p:cNvPicPr>
+          <p:nvPr/>
+        </p:nvPicPr>
+        <p:blipFill>
+          <a:blip r:embed="rId1"/>
+          <a:stretch>
+            <a:fillRect/>
+          </a:stretch>
+        </p:blipFill>
+        <p:spPr>
+          <a:xfrm>
+            <a:off x="8048320" y="128016"/>
+            <a:ext cx="201168" cy="201168"/>
+          </a:xfrm>
+          <a:prstGeom prst="rect">
+            <a:avLst/>
+          </a:prstGeom>
+        </p:spPr>
+      </p:pic>
+      <p:sp>
+        <p:nvSpPr>
+          <p:cNvPr id="16" name="Text 13"/>
+          <p:cNvSpPr txBox="1"/>
+          <p:nvPr/>
+        </p:nvSpPr>
+        <p:spPr>
+          <a:xfrm>
+            <a:off x="8304352" y="91440"/>
+            <a:ext cx="3302127" cy="274320"/>
+          </a:xfrm>
+          <a:prstGeom prst="rect">
+            <a:avLst/>
+          </a:prstGeom>
+          <a:noFill/>
+          <a:ln/>
+        </p:spPr>
+        <p:txBody>
+          <a:bodyPr wrap="square" lIns="0" tIns="0" rIns="0" bIns="0" rtlCol="0" anchor="ctr"/>
+          <a:lstStyle/>
+          <a:p>
+            <a:pPr indent="0" marL="0">
+              <a:buNone/>
+            </a:pPr>
+            <a:r>
+              <a:rPr lang="en-US" sz="1100" b="1" dirty="0">
+                <a:solidFill>
+                  <a:srgbClr val="075985"/>
+                </a:solidFill>
+                <a:latin typeface="Calibri" pitchFamily="34" charset="0"/>
+                <a:ea typeface="Calibri" pitchFamily="34" charset="-122"/>
+                <a:cs typeface="Calibri" pitchFamily="34" charset="-120"/>
+              </a:rPr>
+              <a:t>DA COMPRENDERE OGGI</a:t>
+            </a:r>
+            <a:pPr indent="0" marL="0">
+              <a:buNone/>
+            </a:pPr>
+            <a:r>
+              <a:rPr lang="en-US" sz="1100" dirty="0">
+                <a:solidFill>
+                  <a:srgbClr val="075985"/>
+                </a:solidFill>
+                <a:latin typeface="Calibri" pitchFamily="34" charset="0"/>
+                <a:ea typeface="Calibri" pitchFamily="34" charset="-122"/>
+                <a:cs typeface="Calibri" pitchFamily="34" charset="-120"/>
+              </a:rPr>
+              <a:t> · i registri di RISC-V</a:t>
+            </a:r>
+            <a:endParaRPr lang="en-US" sz="1100" dirty="0"/>
           </a:p>
         </p:txBody>
       </p:sp>
@@ -24042,6 +26506,133 @@
           </a:graphicData>
         </a:graphic>
       </p:graphicFrame>
+      <p:sp>
+        <p:nvSpPr>
+          <p:cNvPr id="4" name="Shape 1"/>
+          <p:cNvSpPr/>
+          <p:nvPr/>
+        </p:nvSpPr>
+        <p:spPr>
+          <a:xfrm>
+            <a:off x="7920304" y="91440"/>
+            <a:ext cx="3722751" cy="274320"/>
+          </a:xfrm>
+          <a:prstGeom prst="rect">
+            <a:avLst/>
+          </a:prstGeom>
+          <a:solidFill>
+            <a:srgbClr val="E0F2FE"/>
+          </a:solidFill>
+          <a:ln w="12700">
+            <a:solidFill>
+              <a:srgbClr val="0369A1"/>
+            </a:solidFill>
+            <a:prstDash val="solid"/>
+          </a:ln>
+        </p:spPr>
+      </p:sp>
+      <p:sp>
+        <p:nvSpPr>
+          <p:cNvPr id="5" name="Shape 2"/>
+          <p:cNvSpPr/>
+          <p:nvPr/>
+        </p:nvSpPr>
+        <p:spPr>
+          <a:xfrm>
+            <a:off x="7920304" y="91440"/>
+            <a:ext cx="73152" cy="274320"/>
+          </a:xfrm>
+          <a:prstGeom prst="rect">
+            <a:avLst/>
+          </a:prstGeom>
+          <a:solidFill>
+            <a:srgbClr val="0369A1"/>
+          </a:solidFill>
+          <a:ln w="12700">
+            <a:solidFill>
+              <a:srgbClr val="0369A1"/>
+            </a:solidFill>
+            <a:prstDash val="solid"/>
+          </a:ln>
+        </p:spPr>
+      </p:sp>
+      <p:pic>
+        <p:nvPicPr>
+          <p:cNvPr id="6" name="Image 0" descr="preencoded.png">    </p:cNvPr>
+          <p:cNvPicPr>
+            <a:picLocks noChangeAspect="1"/>
+          </p:cNvPicPr>
+          <p:nvPr/>
+        </p:nvPicPr>
+        <p:blipFill>
+          <a:blip r:embed="rId1"/>
+          <a:stretch>
+            <a:fillRect/>
+          </a:stretch>
+        </p:blipFill>
+        <p:spPr>
+          <a:xfrm>
+            <a:off x="8048320" y="128016"/>
+            <a:ext cx="201168" cy="201168"/>
+          </a:xfrm>
+          <a:prstGeom prst="rect">
+            <a:avLst/>
+          </a:prstGeom>
+        </p:spPr>
+      </p:pic>
+      <p:sp>
+        <p:nvSpPr>
+          <p:cNvPr id="7" name="Text 3"/>
+          <p:cNvSpPr txBox="1"/>
+          <p:nvPr/>
+        </p:nvSpPr>
+        <p:spPr>
+          <a:xfrm>
+            <a:off x="8304352" y="91440"/>
+            <a:ext cx="3302127" cy="274320"/>
+          </a:xfrm>
+          <a:prstGeom prst="rect">
+            <a:avLst/>
+          </a:prstGeom>
+          <a:noFill/>
+          <a:ln/>
+        </p:spPr>
+        <p:txBody>
+          <a:bodyPr wrap="square" lIns="0" tIns="0" rIns="0" bIns="0" rtlCol="0" anchor="ctr"/>
+          <a:lstStyle/>
+          <a:p>
+            <a:pPr indent="0" marL="0">
+              <a:buNone/>
+            </a:pPr>
+            <a:r>
+              <a:rPr lang="en-US" sz="1100" b="1" dirty="0">
+                <a:solidFill>
+                  <a:srgbClr val="075985"/>
+                </a:solidFill>
+                <a:latin typeface="Calibri" pitchFamily="34" charset="0"/>
+                <a:ea typeface="Calibri" pitchFamily="34" charset="-122"/>
+                <a:cs typeface="Calibri" pitchFamily="34" charset="-120"/>
+              </a:rPr>
+              <a:t>DA COMPRENDERE OGGI</a:t>
+            </a:r>
+            <a:pPr indent="0" marL="0">
+              <a:buNone/>
+            </a:pPr>
+            <a:r>
+              <a:rPr lang="en-US" sz="1100" dirty="0">
+                <a:solidFill>
+                  <a:srgbClr val="075985"/>
+                </a:solidFill>
+                <a:latin typeface="Calibri" pitchFamily="34" charset="0"/>
+                <a:ea typeface="Calibri" pitchFamily="34" charset="-122"/>
+                <a:cs typeface="Calibri" pitchFamily="34" charset="-120"/>
+              </a:rPr>
+              <a:t> · i registri di RISC-V</a:t>
+            </a:r>
+            <a:endParaRPr lang="en-US" sz="1100" dirty="0"/>
+          </a:p>
+        </p:txBody>
+      </p:sp>
       <p:sp>
         <p:nvSpPr>
           <p:cNvPr id="25" name="Slide Number Placeholder 0"/>

--- a/it/slides/18-Architettura_dei_Calcolatori-Processore.pptx
+++ b/it/slides/18-Architettura_dei_Calcolatori-Processore.pptx
@@ -126,13 +126,13 @@
   <p:extLst>
     <p:ext uri="{521415D9-36F7-43E2-AB2F-B90AF26B5E84}">
       <p14:sectionLst xmlns:p14="http://schemas.microsoft.com/office/powerpoint/2010/main">
-        <p14:section name="Apertura" id="{256453c3-fc41-6076-c60b-203ac5f7e35e}">
+        <p14:section name="Apertura" id="{57ff3c63-35ea-f151-20c2-9b5512670c48}">
           <p14:sldIdLst>
             <p14:sldId id="256"/>
             <p14:sldId id="257"/>
           </p14:sldIdLst>
         </p14:section>
-        <p14:section name="Il processore" id="{08de94a7-7d7c-114b-d95e-7468da22a78a}">
+        <p14:section name="Il processore" id="{2075b77c-df86-1fe1-9e5b-ef5e0076d0a1}">
           <p14:sldIdLst>
             <p14:sldId id="258"/>
             <p14:sldId id="259"/>
@@ -141,7 +141,7 @@
             <p14:sldId id="262"/>
           </p14:sldIdLst>
         </p14:section>
-        <p14:section name="I registri" id="{1f9eb142-fe38-de9f-cf9d-6b7d0ff1d895}">
+        <p14:section name="I registri" id="{2ae84c70-c4cd-8c48-a697-8b5cbd1eb818}">
           <p14:sldIdLst>
             <p14:sldId id="263"/>
             <p14:sldId id="264"/>
@@ -149,18 +149,18 @@
             <p14:sldId id="266"/>
           </p14:sldIdLst>
         </p14:section>
-        <p14:section name="Lo stack" id="{172fcf52-795b-95d1-2918-e31c83270353}">
+        <p14:section name="Lo stack" id="{de3afd63-0a67-ca76-10e5-bd7ad63084ad}">
           <p14:sldIdLst>
             <p14:sldId id="267"/>
           </p14:sldIdLst>
         </p14:section>
-        <p14:section name="Modelli di processore" id="{f27ba2bf-eef6-0652-5573-7aec1151bc7f}">
+        <p14:section name="Modelli di processore" id="{9fe44402-e4ca-4ca4-99b1-98c84e89c55d}">
           <p14:sldIdLst>
             <p14:sldId id="268"/>
             <p14:sldId id="269"/>
           </p14:sldIdLst>
         </p14:section>
-        <p14:section name="La ALU e il quadro d'insieme" id="{6da9939b-d1a8-029d-bcbc-da1838cd1bf3}">
+        <p14:section name="La ALU e il quadro d'insieme" id="{698b183d-fc96-5293-2420-84edf1686e28}">
           <p14:sldIdLst>
             <p14:sldId id="270"/>
             <p14:sldId id="271"/>
@@ -2285,7 +2285,7 @@
               <a:rPr lang="en-US" dirty="0"/>
               <a:t>La tabella completa dei registri di RISC-V, con numeri, nomi e ruoli. Ne avete usati la maggior parte: zero, ra, sp, i temporanei da t0 a t6, gli argomenti da a0 ad a7, i registri salvati da s0 a s11. Due sono nuovi: gp e tp, usati da compilatori e sistemi operativi. L'hardware tratta allo stesso modo i registri da x1 a x31; solo x0 è speciale. I ruoli vengono dalla convenzione di chiamata. Il program counter non sta nel banco.
 DA COMPRENDERE OGGI: i registri di RISC-V; la convenzione di chiamata.
-Per il docente: L'hardware tratta allo stesso modo i registri da x1 a x31; solo x0 è speciale. I ruoli vengono dalla convenzione di chiamata (Lezione 02). L'MC68000 separava invece i registri dati D0-D7 dai registri indirizzi A0-A7, con A7 come puntatore allo stack.</a:t>
+Per il docente: L'hardware tratta allo stesso modo i registri da x1 a x31; solo x0 è speciale. I ruoli vengono dalla convenzione di chiamata, incontrata nella Lezione 02 e qui enunciata come regola: una chiamata può distruggere ra e i registri t e a (salvati dal chiamante: salvateli prima della chiamata se vi servono ancora); deve restituire invariati i registri s e sp (salvati dal chiamato: una funzione che li usa li salva nel suo frame e li ripristina prima di ret). L'MC68000 separava invece i registri dati D0-D7 dai registri indirizzi A0-A7, con A7 come puntatore allo stack.</a:t>
             </a:r>
             <a:endParaRPr lang="en-US" dirty="0"/>
           </a:p>
@@ -23642,7 +23642,7 @@
                         <a:buNone/>
                       </a:pPr>
                       <a:r>
-                        <a:rPr lang="en-US" sz="1700" b="1" dirty="0">
+                        <a:rPr lang="en-US" sz="1600" b="1" dirty="0">
                           <a:solidFill>
                             <a:srgbClr val="FFFFFF"/>
                           </a:solidFill>
@@ -23652,7 +23652,7 @@
                         </a:rPr>
                         <a:t>Registro</a:t>
                       </a:r>
-                      <a:endParaRPr lang="en-US" sz="1700" dirty="0">
+                      <a:endParaRPr lang="en-US" sz="1600" dirty="0">
                         <a:latin typeface="Calibri" charset="0"/>
                         <a:ea typeface="Calibri" charset="0"/>
                         <a:cs typeface="Calibri" charset="0"/>
@@ -23710,7 +23710,7 @@
                         <a:buNone/>
                       </a:pPr>
                       <a:r>
-                        <a:rPr lang="en-US" sz="1700" b="1" dirty="0">
+                        <a:rPr lang="en-US" sz="1600" b="1" dirty="0">
                           <a:solidFill>
                             <a:srgbClr val="FFFFFF"/>
                           </a:solidFill>
@@ -23720,7 +23720,7 @@
                         </a:rPr>
                         <a:t>Nome</a:t>
                       </a:r>
-                      <a:endParaRPr lang="en-US" sz="1700" dirty="0">
+                      <a:endParaRPr lang="en-US" sz="1600" dirty="0">
                         <a:latin typeface="Calibri" charset="0"/>
                         <a:ea typeface="Calibri" charset="0"/>
                         <a:cs typeface="Calibri" charset="0"/>
@@ -23778,7 +23778,7 @@
                         <a:buNone/>
                       </a:pPr>
                       <a:r>
-                        <a:rPr lang="en-US" sz="1700" b="1" dirty="0">
+                        <a:rPr lang="en-US" sz="1600" b="1" dirty="0">
                           <a:solidFill>
                             <a:srgbClr val="FFFFFF"/>
                           </a:solidFill>
@@ -23788,7 +23788,7 @@
                         </a:rPr>
                         <a:t>Funzione, per convenzione</a:t>
                       </a:r>
-                      <a:endParaRPr lang="en-US" sz="1700" dirty="0">
+                      <a:endParaRPr lang="en-US" sz="1600" dirty="0">
                         <a:latin typeface="Calibri" charset="0"/>
                         <a:ea typeface="Calibri" charset="0"/>
                         <a:cs typeface="Calibri" charset="0"/>
@@ -23846,7 +23846,7 @@
                         <a:buNone/>
                       </a:pPr>
                       <a:r>
-                        <a:rPr lang="en-US" sz="1700" b="1" dirty="0">
+                        <a:rPr lang="en-US" sz="1600" b="1" dirty="0">
                           <a:solidFill>
                             <a:srgbClr val="FFFFFF"/>
                           </a:solidFill>
@@ -23856,7 +23856,7 @@
                         </a:rPr>
                         <a:t>Registro</a:t>
                       </a:r>
-                      <a:endParaRPr lang="en-US" sz="1700" dirty="0">
+                      <a:endParaRPr lang="en-US" sz="1600" dirty="0">
                         <a:latin typeface="Calibri" charset="0"/>
                         <a:ea typeface="Calibri" charset="0"/>
                         <a:cs typeface="Calibri" charset="0"/>
@@ -23914,7 +23914,7 @@
                         <a:buNone/>
                       </a:pPr>
                       <a:r>
-                        <a:rPr lang="en-US" sz="1700" b="1" dirty="0">
+                        <a:rPr lang="en-US" sz="1600" b="1" dirty="0">
                           <a:solidFill>
                             <a:srgbClr val="FFFFFF"/>
                           </a:solidFill>
@@ -23924,7 +23924,7 @@
                         </a:rPr>
                         <a:t>Nome</a:t>
                       </a:r>
-                      <a:endParaRPr lang="en-US" sz="1700" dirty="0">
+                      <a:endParaRPr lang="en-US" sz="1600" dirty="0">
                         <a:latin typeface="Calibri" charset="0"/>
                         <a:ea typeface="Calibri" charset="0"/>
                         <a:cs typeface="Calibri" charset="0"/>
@@ -23982,7 +23982,7 @@
                         <a:buNone/>
                       </a:pPr>
                       <a:r>
-                        <a:rPr lang="en-US" sz="1700" b="1" dirty="0">
+                        <a:rPr lang="en-US" sz="1600" b="1" dirty="0">
                           <a:solidFill>
                             <a:srgbClr val="FFFFFF"/>
                           </a:solidFill>
@@ -23992,7 +23992,7 @@
                         </a:rPr>
                         <a:t>Funzione, per convenzione</a:t>
                       </a:r>
-                      <a:endParaRPr lang="en-US" sz="1700" dirty="0">
+                      <a:endParaRPr lang="en-US" sz="1600" dirty="0">
                         <a:latin typeface="Calibri" charset="0"/>
                         <a:ea typeface="Calibri" charset="0"/>
                         <a:cs typeface="Calibri" charset="0"/>
@@ -24052,7 +24052,7 @@
                         <a:buNone/>
                       </a:pPr>
                       <a:r>
-                        <a:rPr lang="en-US" sz="1700" dirty="0">
+                        <a:rPr lang="en-US" sz="1600" dirty="0">
                           <a:solidFill>
                             <a:srgbClr val="1B2530"/>
                           </a:solidFill>
@@ -24062,7 +24062,7 @@
                         </a:rPr>
                         <a:t>x0</a:t>
                       </a:r>
-                      <a:endParaRPr lang="en-US" sz="1700" dirty="0">
+                      <a:endParaRPr lang="en-US" sz="1600" dirty="0">
                         <a:latin typeface="Courier New" charset="0"/>
                         <a:ea typeface="Courier New" charset="0"/>
                         <a:cs typeface="Courier New" charset="0"/>
@@ -24120,7 +24120,7 @@
                         <a:buNone/>
                       </a:pPr>
                       <a:r>
-                        <a:rPr lang="en-US" sz="1700" dirty="0">
+                        <a:rPr lang="en-US" sz="1600" dirty="0">
                           <a:solidFill>
                             <a:srgbClr val="1B2530"/>
                           </a:solidFill>
@@ -24130,7 +24130,7 @@
                         </a:rPr>
                         <a:t>zero</a:t>
                       </a:r>
-                      <a:endParaRPr lang="en-US" sz="1700" dirty="0">
+                      <a:endParaRPr lang="en-US" sz="1600" dirty="0">
                         <a:latin typeface="Courier New" charset="0"/>
                         <a:ea typeface="Courier New" charset="0"/>
                         <a:cs typeface="Courier New" charset="0"/>
@@ -24188,7 +24188,7 @@
                         <a:buNone/>
                       </a:pPr>
                       <a:r>
-                        <a:rPr lang="en-US" sz="1700" dirty="0">
+                        <a:rPr lang="en-US" sz="1600" dirty="0">
                           <a:solidFill>
                             <a:srgbClr val="1B2530"/>
                           </a:solidFill>
@@ -24198,7 +24198,7 @@
                         </a:rPr>
                         <a:t>sempre 0</a:t>
                       </a:r>
-                      <a:endParaRPr lang="en-US" sz="1700" dirty="0">
+                      <a:endParaRPr lang="en-US" sz="1600" dirty="0">
                         <a:latin typeface="Calibri" charset="0"/>
                         <a:ea typeface="Calibri" charset="0"/>
                         <a:cs typeface="Calibri" charset="0"/>
@@ -24256,7 +24256,7 @@
                         <a:buNone/>
                       </a:pPr>
                       <a:r>
-                        <a:rPr lang="en-US" sz="1700" dirty="0">
+                        <a:rPr lang="en-US" sz="1600" dirty="0">
                           <a:solidFill>
                             <a:srgbClr val="1B2530"/>
                           </a:solidFill>
@@ -24266,7 +24266,7 @@
                         </a:rPr>
                         <a:t>x8 - x9</a:t>
                       </a:r>
-                      <a:endParaRPr lang="en-US" sz="1700" dirty="0">
+                      <a:endParaRPr lang="en-US" sz="1600" dirty="0">
                         <a:latin typeface="Courier New" charset="0"/>
                         <a:ea typeface="Courier New" charset="0"/>
                         <a:cs typeface="Courier New" charset="0"/>
@@ -24324,7 +24324,7 @@
                         <a:buNone/>
                       </a:pPr>
                       <a:r>
-                        <a:rPr lang="en-US" sz="1700" dirty="0">
+                        <a:rPr lang="en-US" sz="1600" dirty="0">
                           <a:solidFill>
                             <a:srgbClr val="1B2530"/>
                           </a:solidFill>
@@ -24334,7 +24334,7 @@
                         </a:rPr>
                         <a:t>s0 - s1</a:t>
                       </a:r>
-                      <a:endParaRPr lang="en-US" sz="1700" dirty="0">
+                      <a:endParaRPr lang="en-US" sz="1600" dirty="0">
                         <a:latin typeface="Courier New" charset="0"/>
                         <a:ea typeface="Courier New" charset="0"/>
                         <a:cs typeface="Courier New" charset="0"/>
@@ -24392,7 +24392,7 @@
                         <a:buNone/>
                       </a:pPr>
                       <a:r>
-                        <a:rPr lang="en-US" sz="1700" dirty="0">
+                        <a:rPr lang="en-US" sz="1600" dirty="0">
                           <a:solidFill>
                             <a:srgbClr val="1B2530"/>
                           </a:solidFill>
@@ -24402,7 +24402,7 @@
                         </a:rPr>
                         <a:t>salvati</a:t>
                       </a:r>
-                      <a:endParaRPr lang="en-US" sz="1700" dirty="0">
+                      <a:endParaRPr lang="en-US" sz="1600" dirty="0">
                         <a:latin typeface="Calibri" charset="0"/>
                         <a:ea typeface="Calibri" charset="0"/>
                         <a:cs typeface="Calibri" charset="0"/>
@@ -24462,7 +24462,7 @@
                         <a:buNone/>
                       </a:pPr>
                       <a:r>
-                        <a:rPr lang="en-US" sz="1700" dirty="0">
+                        <a:rPr lang="en-US" sz="1600" dirty="0">
                           <a:solidFill>
                             <a:srgbClr val="1B2530"/>
                           </a:solidFill>
@@ -24472,7 +24472,7 @@
                         </a:rPr>
                         <a:t>x1</a:t>
                       </a:r>
-                      <a:endParaRPr lang="en-US" sz="1700" dirty="0">
+                      <a:endParaRPr lang="en-US" sz="1600" dirty="0">
                         <a:latin typeface="Courier New" charset="0"/>
                         <a:ea typeface="Courier New" charset="0"/>
                         <a:cs typeface="Courier New" charset="0"/>
@@ -24530,7 +24530,7 @@
                         <a:buNone/>
                       </a:pPr>
                       <a:r>
-                        <a:rPr lang="en-US" sz="1700" dirty="0">
+                        <a:rPr lang="en-US" sz="1600" dirty="0">
                           <a:solidFill>
                             <a:srgbClr val="1B2530"/>
                           </a:solidFill>
@@ -24540,7 +24540,7 @@
                         </a:rPr>
                         <a:t>ra</a:t>
                       </a:r>
-                      <a:endParaRPr lang="en-US" sz="1700" dirty="0">
+                      <a:endParaRPr lang="en-US" sz="1600" dirty="0">
                         <a:latin typeface="Courier New" charset="0"/>
                         <a:ea typeface="Courier New" charset="0"/>
                         <a:cs typeface="Courier New" charset="0"/>
@@ -24598,7 +24598,7 @@
                         <a:buNone/>
                       </a:pPr>
                       <a:r>
-                        <a:rPr lang="en-US" sz="1700" dirty="0">
+                        <a:rPr lang="en-US" sz="1600" dirty="0">
                           <a:solidFill>
                             <a:srgbClr val="1B2530"/>
                           </a:solidFill>
@@ -24608,7 +24608,7 @@
                         </a:rPr>
                         <a:t>indirizzo di ritorno</a:t>
                       </a:r>
-                      <a:endParaRPr lang="en-US" sz="1700" dirty="0">
+                      <a:endParaRPr lang="en-US" sz="1600" dirty="0">
                         <a:latin typeface="Calibri" charset="0"/>
                         <a:ea typeface="Calibri" charset="0"/>
                         <a:cs typeface="Calibri" charset="0"/>
@@ -24666,7 +24666,7 @@
                         <a:buNone/>
                       </a:pPr>
                       <a:r>
-                        <a:rPr lang="en-US" sz="1700" dirty="0">
+                        <a:rPr lang="en-US" sz="1600" dirty="0">
                           <a:solidFill>
                             <a:srgbClr val="1B2530"/>
                           </a:solidFill>
@@ -24676,7 +24676,7 @@
                         </a:rPr>
                         <a:t>x10 - x11</a:t>
                       </a:r>
-                      <a:endParaRPr lang="en-US" sz="1700" dirty="0">
+                      <a:endParaRPr lang="en-US" sz="1600" dirty="0">
                         <a:latin typeface="Courier New" charset="0"/>
                         <a:ea typeface="Courier New" charset="0"/>
                         <a:cs typeface="Courier New" charset="0"/>
@@ -24734,7 +24734,7 @@
                         <a:buNone/>
                       </a:pPr>
                       <a:r>
-                        <a:rPr lang="en-US" sz="1700" dirty="0">
+                        <a:rPr lang="en-US" sz="1600" dirty="0">
                           <a:solidFill>
                             <a:srgbClr val="1B2530"/>
                           </a:solidFill>
@@ -24744,7 +24744,7 @@
                         </a:rPr>
                         <a:t>a0 - a1</a:t>
                       </a:r>
-                      <a:endParaRPr lang="en-US" sz="1700" dirty="0">
+                      <a:endParaRPr lang="en-US" sz="1600" dirty="0">
                         <a:latin typeface="Courier New" charset="0"/>
                         <a:ea typeface="Courier New" charset="0"/>
                         <a:cs typeface="Courier New" charset="0"/>
@@ -24802,7 +24802,7 @@
                         <a:buNone/>
                       </a:pPr>
                       <a:r>
-                        <a:rPr lang="en-US" sz="1700" dirty="0">
+                        <a:rPr lang="en-US" sz="1600" dirty="0">
                           <a:solidFill>
                             <a:srgbClr val="1B2530"/>
                           </a:solidFill>
@@ -24812,7 +24812,7 @@
                         </a:rPr>
                         <a:t>argomenti, risultati</a:t>
                       </a:r>
-                      <a:endParaRPr lang="en-US" sz="1700" dirty="0">
+                      <a:endParaRPr lang="en-US" sz="1600" dirty="0">
                         <a:latin typeface="Calibri" charset="0"/>
                         <a:ea typeface="Calibri" charset="0"/>
                         <a:cs typeface="Calibri" charset="0"/>
@@ -24872,7 +24872,7 @@
                         <a:buNone/>
                       </a:pPr>
                       <a:r>
-                        <a:rPr lang="en-US" sz="1700" dirty="0">
+                        <a:rPr lang="en-US" sz="1600" dirty="0">
                           <a:solidFill>
                             <a:srgbClr val="1B2530"/>
                           </a:solidFill>
@@ -24882,7 +24882,7 @@
                         </a:rPr>
                         <a:t>x2</a:t>
                       </a:r>
-                      <a:endParaRPr lang="en-US" sz="1700" dirty="0">
+                      <a:endParaRPr lang="en-US" sz="1600" dirty="0">
                         <a:latin typeface="Courier New" charset="0"/>
                         <a:ea typeface="Courier New" charset="0"/>
                         <a:cs typeface="Courier New" charset="0"/>
@@ -24940,7 +24940,7 @@
                         <a:buNone/>
                       </a:pPr>
                       <a:r>
-                        <a:rPr lang="en-US" sz="1700" dirty="0">
+                        <a:rPr lang="en-US" sz="1600" dirty="0">
                           <a:solidFill>
                             <a:srgbClr val="1B2530"/>
                           </a:solidFill>
@@ -24950,7 +24950,7 @@
                         </a:rPr>
                         <a:t>sp</a:t>
                       </a:r>
-                      <a:endParaRPr lang="en-US" sz="1700" dirty="0">
+                      <a:endParaRPr lang="en-US" sz="1600" dirty="0">
                         <a:latin typeface="Courier New" charset="0"/>
                         <a:ea typeface="Courier New" charset="0"/>
                         <a:cs typeface="Courier New" charset="0"/>
@@ -25008,7 +25008,7 @@
                         <a:buNone/>
                       </a:pPr>
                       <a:r>
-                        <a:rPr lang="en-US" sz="1700" dirty="0">
+                        <a:rPr lang="en-US" sz="1600" dirty="0">
                           <a:solidFill>
                             <a:srgbClr val="1B2530"/>
                           </a:solidFill>
@@ -25018,7 +25018,7 @@
                         </a:rPr>
                         <a:t>puntatore allo stack</a:t>
                       </a:r>
-                      <a:endParaRPr lang="en-US" sz="1700" dirty="0">
+                      <a:endParaRPr lang="en-US" sz="1600" dirty="0">
                         <a:latin typeface="Calibri" charset="0"/>
                         <a:ea typeface="Calibri" charset="0"/>
                         <a:cs typeface="Calibri" charset="0"/>
@@ -25076,7 +25076,7 @@
                         <a:buNone/>
                       </a:pPr>
                       <a:r>
-                        <a:rPr lang="en-US" sz="1700" dirty="0">
+                        <a:rPr lang="en-US" sz="1600" dirty="0">
                           <a:solidFill>
                             <a:srgbClr val="1B2530"/>
                           </a:solidFill>
@@ -25086,7 +25086,7 @@
                         </a:rPr>
                         <a:t>x12 - x17</a:t>
                       </a:r>
-                      <a:endParaRPr lang="en-US" sz="1700" dirty="0">
+                      <a:endParaRPr lang="en-US" sz="1600" dirty="0">
                         <a:latin typeface="Courier New" charset="0"/>
                         <a:ea typeface="Courier New" charset="0"/>
                         <a:cs typeface="Courier New" charset="0"/>
@@ -25144,7 +25144,7 @@
                         <a:buNone/>
                       </a:pPr>
                       <a:r>
-                        <a:rPr lang="en-US" sz="1700" dirty="0">
+                        <a:rPr lang="en-US" sz="1600" dirty="0">
                           <a:solidFill>
                             <a:srgbClr val="1B2530"/>
                           </a:solidFill>
@@ -25154,7 +25154,7 @@
                         </a:rPr>
                         <a:t>a2 - a7</a:t>
                       </a:r>
-                      <a:endParaRPr lang="en-US" sz="1700" dirty="0">
+                      <a:endParaRPr lang="en-US" sz="1600" dirty="0">
                         <a:latin typeface="Courier New" charset="0"/>
                         <a:ea typeface="Courier New" charset="0"/>
                         <a:cs typeface="Courier New" charset="0"/>
@@ -25212,7 +25212,7 @@
                         <a:buNone/>
                       </a:pPr>
                       <a:r>
-                        <a:rPr lang="en-US" sz="1700" dirty="0">
+                        <a:rPr lang="en-US" sz="1600" dirty="0">
                           <a:solidFill>
                             <a:srgbClr val="1B2530"/>
                           </a:solidFill>
@@ -25222,7 +25222,7 @@
                         </a:rPr>
                         <a:t>argomenti</a:t>
                       </a:r>
-                      <a:endParaRPr lang="en-US" sz="1700" dirty="0">
+                      <a:endParaRPr lang="en-US" sz="1600" dirty="0">
                         <a:latin typeface="Calibri" charset="0"/>
                         <a:ea typeface="Calibri" charset="0"/>
                         <a:cs typeface="Calibri" charset="0"/>
@@ -25282,7 +25282,7 @@
                         <a:buNone/>
                       </a:pPr>
                       <a:r>
-                        <a:rPr lang="en-US" sz="1700" dirty="0">
+                        <a:rPr lang="en-US" sz="1600" dirty="0">
                           <a:solidFill>
                             <a:srgbClr val="1B2530"/>
                           </a:solidFill>
@@ -25292,7 +25292,7 @@
                         </a:rPr>
                         <a:t>x3</a:t>
                       </a:r>
-                      <a:endParaRPr lang="en-US" sz="1700" dirty="0">
+                      <a:endParaRPr lang="en-US" sz="1600" dirty="0">
                         <a:latin typeface="Courier New" charset="0"/>
                         <a:ea typeface="Courier New" charset="0"/>
                         <a:cs typeface="Courier New" charset="0"/>
@@ -25350,7 +25350,7 @@
                         <a:buNone/>
                       </a:pPr>
                       <a:r>
-                        <a:rPr lang="en-US" sz="1700" dirty="0">
+                        <a:rPr lang="en-US" sz="1600" dirty="0">
                           <a:solidFill>
                             <a:srgbClr val="1B2530"/>
                           </a:solidFill>
@@ -25360,7 +25360,7 @@
                         </a:rPr>
                         <a:t>gp</a:t>
                       </a:r>
-                      <a:endParaRPr lang="en-US" sz="1700" dirty="0">
+                      <a:endParaRPr lang="en-US" sz="1600" dirty="0">
                         <a:latin typeface="Courier New" charset="0"/>
                         <a:ea typeface="Courier New" charset="0"/>
                         <a:cs typeface="Courier New" charset="0"/>
@@ -25418,7 +25418,7 @@
                         <a:buNone/>
                       </a:pPr>
                       <a:r>
-                        <a:rPr lang="en-US" sz="1700" dirty="0">
+                        <a:rPr lang="en-US" sz="1600" dirty="0">
                           <a:solidFill>
                             <a:srgbClr val="1B2530"/>
                           </a:solidFill>
@@ -25428,7 +25428,7 @@
                         </a:rPr>
                         <a:t>puntatore globale</a:t>
                       </a:r>
-                      <a:endParaRPr lang="en-US" sz="1700" dirty="0">
+                      <a:endParaRPr lang="en-US" sz="1600" dirty="0">
                         <a:latin typeface="Calibri" charset="0"/>
                         <a:ea typeface="Calibri" charset="0"/>
                         <a:cs typeface="Calibri" charset="0"/>
@@ -25486,7 +25486,7 @@
                         <a:buNone/>
                       </a:pPr>
                       <a:r>
-                        <a:rPr lang="en-US" sz="1700" dirty="0">
+                        <a:rPr lang="en-US" sz="1600" dirty="0">
                           <a:solidFill>
                             <a:srgbClr val="1B2530"/>
                           </a:solidFill>
@@ -25496,7 +25496,7 @@
                         </a:rPr>
                         <a:t>x18 - x27</a:t>
                       </a:r>
-                      <a:endParaRPr lang="en-US" sz="1700" dirty="0">
+                      <a:endParaRPr lang="en-US" sz="1600" dirty="0">
                         <a:latin typeface="Courier New" charset="0"/>
                         <a:ea typeface="Courier New" charset="0"/>
                         <a:cs typeface="Courier New" charset="0"/>
@@ -25554,7 +25554,7 @@
                         <a:buNone/>
                       </a:pPr>
                       <a:r>
-                        <a:rPr lang="en-US" sz="1700" dirty="0">
+                        <a:rPr lang="en-US" sz="1600" dirty="0">
                           <a:solidFill>
                             <a:srgbClr val="1B2530"/>
                           </a:solidFill>
@@ -25564,7 +25564,7 @@
                         </a:rPr>
                         <a:t>s2 - s11</a:t>
                       </a:r>
-                      <a:endParaRPr lang="en-US" sz="1700" dirty="0">
+                      <a:endParaRPr lang="en-US" sz="1600" dirty="0">
                         <a:latin typeface="Courier New" charset="0"/>
                         <a:ea typeface="Courier New" charset="0"/>
                         <a:cs typeface="Courier New" charset="0"/>
@@ -25622,7 +25622,7 @@
                         <a:buNone/>
                       </a:pPr>
                       <a:r>
-                        <a:rPr lang="en-US" sz="1700" dirty="0">
+                        <a:rPr lang="en-US" sz="1600" dirty="0">
                           <a:solidFill>
                             <a:srgbClr val="1B2530"/>
                           </a:solidFill>
@@ -25632,7 +25632,7 @@
                         </a:rPr>
                         <a:t>salvati</a:t>
                       </a:r>
-                      <a:endParaRPr lang="en-US" sz="1700" dirty="0">
+                      <a:endParaRPr lang="en-US" sz="1600" dirty="0">
                         <a:latin typeface="Calibri" charset="0"/>
                         <a:ea typeface="Calibri" charset="0"/>
                         <a:cs typeface="Calibri" charset="0"/>
@@ -25692,7 +25692,7 @@
                         <a:buNone/>
                       </a:pPr>
                       <a:r>
-                        <a:rPr lang="en-US" sz="1700" dirty="0">
+                        <a:rPr lang="en-US" sz="1600" dirty="0">
                           <a:solidFill>
                             <a:srgbClr val="1B2530"/>
                           </a:solidFill>
@@ -25702,7 +25702,7 @@
                         </a:rPr>
                         <a:t>x4</a:t>
                       </a:r>
-                      <a:endParaRPr lang="en-US" sz="1700" dirty="0">
+                      <a:endParaRPr lang="en-US" sz="1600" dirty="0">
                         <a:latin typeface="Courier New" charset="0"/>
                         <a:ea typeface="Courier New" charset="0"/>
                         <a:cs typeface="Courier New" charset="0"/>
@@ -25760,7 +25760,7 @@
                         <a:buNone/>
                       </a:pPr>
                       <a:r>
-                        <a:rPr lang="en-US" sz="1700" dirty="0">
+                        <a:rPr lang="en-US" sz="1600" dirty="0">
                           <a:solidFill>
                             <a:srgbClr val="1B2530"/>
                           </a:solidFill>
@@ -25770,7 +25770,7 @@
                         </a:rPr>
                         <a:t>tp</a:t>
                       </a:r>
-                      <a:endParaRPr lang="en-US" sz="1700" dirty="0">
+                      <a:endParaRPr lang="en-US" sz="1600" dirty="0">
                         <a:latin typeface="Courier New" charset="0"/>
                         <a:ea typeface="Courier New" charset="0"/>
                         <a:cs typeface="Courier New" charset="0"/>
@@ -25828,7 +25828,7 @@
                         <a:buNone/>
                       </a:pPr>
                       <a:r>
-                        <a:rPr lang="en-US" sz="1700" dirty="0">
+                        <a:rPr lang="en-US" sz="1600" dirty="0">
                           <a:solidFill>
                             <a:srgbClr val="1B2530"/>
                           </a:solidFill>
@@ -25838,7 +25838,7 @@
                         </a:rPr>
                         <a:t>puntatore al thread</a:t>
                       </a:r>
-                      <a:endParaRPr lang="en-US" sz="1700" dirty="0">
+                      <a:endParaRPr lang="en-US" sz="1600" dirty="0">
                         <a:latin typeface="Calibri" charset="0"/>
                         <a:ea typeface="Calibri" charset="0"/>
                         <a:cs typeface="Calibri" charset="0"/>
@@ -25896,7 +25896,7 @@
                         <a:buNone/>
                       </a:pPr>
                       <a:r>
-                        <a:rPr lang="en-US" sz="1700" dirty="0">
+                        <a:rPr lang="en-US" sz="1600" dirty="0">
                           <a:solidFill>
                             <a:srgbClr val="1B2530"/>
                           </a:solidFill>
@@ -25906,7 +25906,7 @@
                         </a:rPr>
                         <a:t>x28 - x31</a:t>
                       </a:r>
-                      <a:endParaRPr lang="en-US" sz="1700" dirty="0">
+                      <a:endParaRPr lang="en-US" sz="1600" dirty="0">
                         <a:latin typeface="Courier New" charset="0"/>
                         <a:ea typeface="Courier New" charset="0"/>
                         <a:cs typeface="Courier New" charset="0"/>
@@ -25964,7 +25964,7 @@
                         <a:buNone/>
                       </a:pPr>
                       <a:r>
-                        <a:rPr lang="en-US" sz="1700" dirty="0">
+                        <a:rPr lang="en-US" sz="1600" dirty="0">
                           <a:solidFill>
                             <a:srgbClr val="1B2530"/>
                           </a:solidFill>
@@ -25974,7 +25974,7 @@
                         </a:rPr>
                         <a:t>t3 - t6</a:t>
                       </a:r>
-                      <a:endParaRPr lang="en-US" sz="1700" dirty="0">
+                      <a:endParaRPr lang="en-US" sz="1600" dirty="0">
                         <a:latin typeface="Courier New" charset="0"/>
                         <a:ea typeface="Courier New" charset="0"/>
                         <a:cs typeface="Courier New" charset="0"/>
@@ -26032,7 +26032,7 @@
                         <a:buNone/>
                       </a:pPr>
                       <a:r>
-                        <a:rPr lang="en-US" sz="1700" dirty="0">
+                        <a:rPr lang="en-US" sz="1600" dirty="0">
                           <a:solidFill>
                             <a:srgbClr val="1B2530"/>
                           </a:solidFill>
@@ -26042,7 +26042,7 @@
                         </a:rPr>
                         <a:t>temporanei</a:t>
                       </a:r>
-                      <a:endParaRPr lang="en-US" sz="1700" dirty="0">
+                      <a:endParaRPr lang="en-US" sz="1600" dirty="0">
                         <a:latin typeface="Calibri" charset="0"/>
                         <a:ea typeface="Calibri" charset="0"/>
                         <a:cs typeface="Calibri" charset="0"/>
@@ -26102,7 +26102,7 @@
                         <a:buNone/>
                       </a:pPr>
                       <a:r>
-                        <a:rPr lang="en-US" sz="1700" dirty="0">
+                        <a:rPr lang="en-US" sz="1600" dirty="0">
                           <a:solidFill>
                             <a:srgbClr val="1B2530"/>
                           </a:solidFill>
@@ -26112,7 +26112,7 @@
                         </a:rPr>
                         <a:t>x5 - x7</a:t>
                       </a:r>
-                      <a:endParaRPr lang="en-US" sz="1700" dirty="0">
+                      <a:endParaRPr lang="en-US" sz="1600" dirty="0">
                         <a:latin typeface="Courier New" charset="0"/>
                         <a:ea typeface="Courier New" charset="0"/>
                         <a:cs typeface="Courier New" charset="0"/>
@@ -26170,7 +26170,7 @@
                         <a:buNone/>
                       </a:pPr>
                       <a:r>
-                        <a:rPr lang="en-US" sz="1700" dirty="0">
+                        <a:rPr lang="en-US" sz="1600" dirty="0">
                           <a:solidFill>
                             <a:srgbClr val="1B2530"/>
                           </a:solidFill>
@@ -26180,7 +26180,7 @@
                         </a:rPr>
                         <a:t>t0 - t2</a:t>
                       </a:r>
-                      <a:endParaRPr lang="en-US" sz="1700" dirty="0">
+                      <a:endParaRPr lang="en-US" sz="1600" dirty="0">
                         <a:latin typeface="Courier New" charset="0"/>
                         <a:ea typeface="Courier New" charset="0"/>
                         <a:cs typeface="Courier New" charset="0"/>
@@ -26238,7 +26238,7 @@
                         <a:buNone/>
                       </a:pPr>
                       <a:r>
-                        <a:rPr lang="en-US" sz="1700" dirty="0">
+                        <a:rPr lang="en-US" sz="1600" dirty="0">
                           <a:solidFill>
                             <a:srgbClr val="1B2530"/>
                           </a:solidFill>
@@ -26248,7 +26248,7 @@
                         </a:rPr>
                         <a:t>temporanei</a:t>
                       </a:r>
-                      <a:endParaRPr lang="en-US" sz="1700" dirty="0">
+                      <a:endParaRPr lang="en-US" sz="1600" dirty="0">
                         <a:latin typeface="Calibri" charset="0"/>
                         <a:ea typeface="Calibri" charset="0"/>
                         <a:cs typeface="Calibri" charset="0"/>
@@ -26306,7 +26306,7 @@
                         <a:buNone/>
                       </a:pPr>
                       <a:r>
-                        <a:rPr lang="en-US" sz="1700" dirty="0">
+                        <a:rPr lang="en-US" sz="1600" dirty="0">
                           <a:solidFill>
                             <a:srgbClr val="1B2530"/>
                           </a:solidFill>
@@ -26316,7 +26316,7 @@
                         </a:rPr>
                         <a:t>pc</a:t>
                       </a:r>
-                      <a:endParaRPr lang="en-US" sz="1700" dirty="0">
+                      <a:endParaRPr lang="en-US" sz="1600" dirty="0">
                         <a:latin typeface="Courier New" charset="0"/>
                         <a:ea typeface="Courier New" charset="0"/>
                         <a:cs typeface="Courier New" charset="0"/>
@@ -26374,7 +26374,7 @@
                         <a:buNone/>
                       </a:pPr>
                       <a:r>
-                        <a:rPr lang="en-US" sz="1700" dirty="0">
+                        <a:rPr lang="en-US" sz="1600" dirty="0">
                           <a:solidFill>
                             <a:srgbClr val="1B2530"/>
                           </a:solidFill>
@@ -26384,7 +26384,7 @@
                         </a:rPr>
                         <a:t>-</a:t>
                       </a:r>
-                      <a:endParaRPr lang="en-US" sz="1700" dirty="0">
+                      <a:endParaRPr lang="en-US" sz="1600" dirty="0">
                         <a:latin typeface="Courier New" charset="0"/>
                         <a:ea typeface="Courier New" charset="0"/>
                         <a:cs typeface="Courier New" charset="0"/>
@@ -26442,7 +26442,7 @@
                         <a:buNone/>
                       </a:pPr>
                       <a:r>
-                        <a:rPr lang="en-US" sz="1700" dirty="0">
+                        <a:rPr lang="en-US" sz="1600" dirty="0">
                           <a:solidFill>
                             <a:srgbClr val="1B2530"/>
                           </a:solidFill>
@@ -26452,7 +26452,7 @@
                         </a:rPr>
                         <a:t>program counter (fuori dal banco)</a:t>
                       </a:r>
-                      <a:endParaRPr lang="en-US" sz="1700" dirty="0">
+                      <a:endParaRPr lang="en-US" sz="1600" dirty="0">
                         <a:latin typeface="Calibri" charset="0"/>
                         <a:ea typeface="Calibri" charset="0"/>
                         <a:cs typeface="Calibri" charset="0"/>
@@ -26508,7 +26508,46 @@
       </p:graphicFrame>
       <p:sp>
         <p:nvSpPr>
-          <p:cNvPr id="4" name="Shape 1"/>
+          <p:cNvPr id="4" name="Text 1"/>
+          <p:cNvSpPr txBox="1"/>
+          <p:nvPr/>
+        </p:nvSpPr>
+        <p:spPr>
+          <a:xfrm>
+            <a:off x="548640" y="5760720"/>
+            <a:ext cx="11094415" cy="411480"/>
+          </a:xfrm>
+          <a:prstGeom prst="rect">
+            <a:avLst/>
+          </a:prstGeom>
+          <a:noFill/>
+          <a:ln/>
+        </p:spPr>
+        <p:txBody>
+          <a:bodyPr wrap="square" lIns="0" tIns="0" rIns="0" bIns="0" rtlCol="0" anchor="ctr"/>
+          <a:lstStyle/>
+          <a:p>
+            <a:pPr indent="0" marL="0">
+              <a:buNone/>
+            </a:pPr>
+            <a:r>
+              <a:rPr lang="en-US" sz="1300" i="1" dirty="0">
+                <a:solidFill>
+                  <a:srgbClr val="5B6B78"/>
+                </a:solidFill>
+                <a:latin typeface="Calibri" pitchFamily="34" charset="0"/>
+                <a:ea typeface="Calibri" pitchFamily="34" charset="-122"/>
+                <a:cs typeface="Calibri" pitchFamily="34" charset="-120"/>
+              </a:rPr>
+              <a:t>La regola della convenzione: una chiamata può distruggere ra, t e a (salvati dal chiamante); s e sp tornano invariati (salvati dal chiamato).</a:t>
+            </a:r>
+            <a:endParaRPr lang="en-US" sz="1300" dirty="0"/>
+          </a:p>
+        </p:txBody>
+      </p:sp>
+      <p:sp>
+        <p:nvSpPr>
+          <p:cNvPr id="5" name="Shape 2"/>
           <p:cNvSpPr/>
           <p:nvPr/>
         </p:nvSpPr>
@@ -26533,7 +26572,7 @@
       </p:sp>
       <p:sp>
         <p:nvSpPr>
-          <p:cNvPr id="5" name="Shape 2"/>
+          <p:cNvPr id="6" name="Shape 3"/>
           <p:cNvSpPr/>
           <p:nvPr/>
         </p:nvSpPr>
@@ -26558,7 +26597,7 @@
       </p:sp>
       <p:pic>
         <p:nvPicPr>
-          <p:cNvPr id="6" name="Image 0" descr="preencoded.png">    </p:cNvPr>
+          <p:cNvPr id="7" name="Image 0" descr="preencoded.png">    </p:cNvPr>
           <p:cNvPicPr>
             <a:picLocks noChangeAspect="1"/>
           </p:cNvPicPr>
@@ -26582,7 +26621,7 @@
       </p:pic>
       <p:sp>
         <p:nvSpPr>
-          <p:cNvPr id="7" name="Text 3"/>
+          <p:cNvPr id="8" name="Text 4"/>
           <p:cNvSpPr txBox="1"/>
           <p:nvPr/>
         </p:nvSpPr>

--- a/it/slides/18-Architettura_dei_Calcolatori-Processore.pptx
+++ b/it/slides/18-Architettura_dei_Calcolatori-Processore.pptx
@@ -126,13 +126,13 @@
   <p:extLst>
     <p:ext uri="{521415D9-36F7-43E2-AB2F-B90AF26B5E84}">
       <p14:sectionLst xmlns:p14="http://schemas.microsoft.com/office/powerpoint/2010/main">
-        <p14:section name="Apertura" id="{57ff3c63-35ea-f151-20c2-9b5512670c48}">
+        <p14:section name="Apertura" id="{446a6482-b0f8-9a8e-751d-66f61429587f}">
           <p14:sldIdLst>
             <p14:sldId id="256"/>
             <p14:sldId id="257"/>
           </p14:sldIdLst>
         </p14:section>
-        <p14:section name="Il processore" id="{2075b77c-df86-1fe1-9e5b-ef5e0076d0a1}">
+        <p14:section name="Il processore" id="{6b900852-fbb3-5276-3b76-1052d82b2c32}">
           <p14:sldIdLst>
             <p14:sldId id="258"/>
             <p14:sldId id="259"/>
@@ -141,7 +141,7 @@
             <p14:sldId id="262"/>
           </p14:sldIdLst>
         </p14:section>
-        <p14:section name="I registri" id="{2ae84c70-c4cd-8c48-a697-8b5cbd1eb818}">
+        <p14:section name="I registri" id="{493db1d5-400e-c567-bf04-63853a142700}">
           <p14:sldIdLst>
             <p14:sldId id="263"/>
             <p14:sldId id="264"/>
@@ -149,18 +149,18 @@
             <p14:sldId id="266"/>
           </p14:sldIdLst>
         </p14:section>
-        <p14:section name="Lo stack" id="{de3afd63-0a67-ca76-10e5-bd7ad63084ad}">
+        <p14:section name="Lo stack" id="{40c4a898-9a1c-52e4-1d34-0831b475cc05}">
           <p14:sldIdLst>
             <p14:sldId id="267"/>
           </p14:sldIdLst>
         </p14:section>
-        <p14:section name="Modelli di processore" id="{9fe44402-e4ca-4ca4-99b1-98c84e89c55d}">
+        <p14:section name="Modelli di processore" id="{9a76535b-01d8-23e8-ed53-9ccfb7f85e31}">
           <p14:sldIdLst>
             <p14:sldId id="268"/>
             <p14:sldId id="269"/>
           </p14:sldIdLst>
         </p14:section>
-        <p14:section name="La ALU e il quadro d'insieme" id="{698b183d-fc96-5293-2420-84edf1686e28}">
+        <p14:section name="La ALU e il quadro d'insieme" id="{e384407f-8346-6c24-b091-baaca81b0bd2}">
           <p14:sldIdLst>
             <p14:sldId id="270"/>
             <p14:sldId id="271"/>
@@ -574,7 +574,7 @@
           <a:p>
             <a:r>
               <a:rPr lang="en-US" dirty="0"/>
-              <a:t>L'ultimo blocco del corso apre la macchina che finora ha eseguito i vostri programmi. Questa lezione presenta il processore due volte: prima come modello generale, valido per ogni processore, con unità di controllo, registri, stack e unità aritmetica; poi come RISC-V, il processore che programmate dai primi giorni. Ogni elemento astratto del modello ha già, per voi, un nome familiare. L'anello della citazione è il processore stesso: l'unico componente che comanda tutti gli altri.
+              <a:t>L'ultimo blocco del corso apre la macchina che ha eseguito ogni programma scritto finora. Questa lezione presenta il processore due volte: prima come modello generale di riferimento, valido per qualsiasi processore, con la sua unità di controllo, i registri, lo stack e l'unità aritmetica; poi come RISC-V, il processore programmato dalle prime settimane. Ogni elemento astratto del modello ha già, per lo studente, un nome familiare, e il metodo della lezione è rendere esplicita quella corrispondenza. L'anello della citazione è il processore stesso: l'unico componente che comanda tutti gli altri.
 Stato di apprendimento: DA COMPRENDERE OGGI, alla fine di questa lezione lo spiegate, lo seguite passo passo e lo applicate da soli; DA UTILIZZARE OGGI, oggi seguite e usate la ricetta; come funziona dentro si spiega più avanti, o non fa parte del corso; DA COMPRENDERE PIÙ AVANTI, riconoscete il nome e lo scopo; lo spiega una lezione successiva. Una slide senza etichetta è contesto: una storia, un esempio, una domanda, un esercizio.
 Stato di apprendimento di questa lezione. DA COMPRENDERE OGGI: accumulatore, pila, registri; il modello del processore; i registri di RISC-V; la convenzione di chiamata; la pila; il processore RV32. DA UTILIZZARE OGGI: il programma completo, gli strumenti di PRG32 (si usa, non si studia, in questo corso). DA COMPRENDERE PIÙ AVANTI: interruzioni e trap (Lezione 19). Una slide senza etichetta è contesto: una storia, un esempio, una domanda, un esercizio.
 Per il docente: La presentazione originale esponeva un modello generale di processore e finiva con l'architettura del Motorola MC68000. Qui il modello generale resta e il riferimento è RISC-V (RV32IMAC, come sull'ESP32-C6 del kit PRG32): gli studenti lo programmano dai primi giorni, quindi ogni elemento astratto ha un nome che conoscono già.</a:t>
@@ -665,7 +665,7 @@
           <a:p>
             <a:r>
               <a:rPr lang="en-US" dirty="0"/>
-              <a:t>Molti processori hanno un registro di stato i cui bit, i flag, registrano l'esito dell'ultima operazione: zero, negativo, overflow, riporto. Un'istruzione li imposta, e un salto condizionato successivo li esamina. RISC-V non ne ha. Un salto confronta due registri e salta, tutto in una sola istruzione; slt scrive il risultato di un confronto in un registro ordinario; riporto e overflow si calcolano quando servono, come nella Lezione 05. Meno stato nascosto significa un processore più semplice e interruzioni più semplici.
+              <a:t>Molti processori hanno un registro di stato i cui bit, i flag, registrano l'esito dell'ultima operazione: zero, negativo, overflow, riporto. Un'istruzione li imposta e un successivo salto condizionato li verifica. RISC-V non ne ha. Un salto confronta due registri e salta, in una sola istruzione; slt scrive il risultato di un confronto in un registro ordinario; riporto e overflow si calcolano quando servono, come nella Lezione 05. Meno stato nascosto significa un processore più semplice, una pipeline più semplice e una gestione delle interruzioni più semplice, perché non c'è stato implicito da salvare.
 DA COMPRENDERE OGGI: i registri di RISC-V.
 Per il docente: Registro di stato. La presentazione originale elencava Z, N, P (positivo), V, C e un bit di parità.</a:t>
             </a:r>
@@ -755,7 +755,7 @@
           <a:p>
             <a:r>
               <a:rPr lang="en-US" dirty="0"/>
-              <a:t>I registri speciali di RISC-V sono i registri di controllo e stato, CSR: un banco separato, letto e scritto solo da codice privilegiato con istruzioni dedicate. Cinque vanno conosciuti per nome: mstatus, con l'abilitazione globale delle interruzioni; mtvec, l'indirizzo della routine che gestisce le trap; mepc, l'indirizzo dell'istruzione interrotta; mcause, la ragione della trap; e la coppia mie e mip, con un bit per sorgente di interruzione. La prossima lezione li usa tutti.
+              <a:t>I registri speciali di RISC-V sono i registri di controllo e di stato, CSR: un banco separato, letto e scritto solo da codice privilegiato con istruzioni dedicate. Cinque meritano di essere conosciuti per nome: mstatus, che contiene l'abilitazione globale delle interruzioni; mtvec, l'indirizzo della routine di gestione delle trap; mepc, l'indirizzo dell'istruzione interrotta; mcause, la causa della trap; e la coppia mie e mip, con un bit per sorgente di interruzione. La prossima lezione li usa tutti.
 DA COMPRENDERE OGGI: i registri di RISC-V. DA COMPRENDERE PIÙ AVANTI: interruzioni e trap (si studia nella Lezione 19).
 Per il docente: Registri di controllo e stato: un banco separato di al più 4096 registri, letti e scritti solo con le istruzioni csrrw, csrrs e csrrc, e solo da codice privilegiato. Sono i «registri delle interruzioni» del modello generale, e l'argomento della Lezione 19.</a:t>
             </a:r>
@@ -845,7 +845,7 @@
           <a:p>
             <a:r>
               <a:rPr lang="en-US" dirty="0"/>
-              <a:t>Uno stack ha due operazioni: push memorizza un elemento in cima alla pila, pop toglie l'elemento in cima. Lavora sempre sulla cima, quindi non occorre dire dove: l'ultimo a entrare è il primo a uscire. Serve a mettere da parte il contenuto dei registri da liberare per un compito e a ripristinarlo dopo. Si realizza con un puntatore che indica l'ultimo elemento. I programmi accurati controllano l'overflow su un push e lo stack vuoto su un pop.
+              <a:t>Uno stack supporta due operazioni: push pone un elemento in cima, pop rimuove l'elemento più in alto. Opera sempre in cima, quindi non serve specificare alcuna posizione: l'ultimo entrato è il primo a uscire. Serve a mettere da parte il contenuto dei registri che vanno liberati per un compito e a ripristinarlo poi, nelle chiamate di sottoprogramma come nelle interruzioni. Si realizza con un puntatore che indica l'ultimo elemento memorizzato. I programmi accurati verificano il trabocco su un push e lo stack vuoto su un pop. Lo stack frame della Lezione 02 si vede ora nella sua forma generale.
 DA COMPRENDERE OGGI: la pila; la convenzione di chiamata.
 Per il docente: LIFO, last in, first out. Lo usate dalla Lezione 02 per salvare ra.</a:t>
             </a:r>
@@ -935,7 +935,7 @@
           <a:p>
             <a:r>
               <a:rPr lang="en-US" dirty="0"/>
-              <a:t>Quattro architetture. Con i registri generici il processore ha un insieme di registri intercambiabili. Con un accumulatore, le istruzioni aritmetiche hanno un operando implicito, un registro speciale. In una macchina a stack non ci sono né gli uni né l'altro, solo un puntatore allo stack, e le istruzioni lavorano sulla cima dello stack. Un'architettura ortogonale ha un unico banco di registri generici, alcuni dei quali fanno anche da puntatore allo stack o svolgono altri ruoli speciali. RISC-V è di quest'ultimo tipo.
+              <a:t>Quattro architetture di processore. Con registri generali il processore ha un insieme di registri intercambiabili. Con un accumulatore, le istruzioni aritmetiche hanno un operando implicito, un registro speciale. In una macchina a stack non c'è né l'uno né l'altro, solo un puntatore allo stack, e le istruzioni operano sulla cima dello stack. Un'architettura ortogonale ha un solo banco di registri generali, alcuni dei quali possono fungere anche da puntatore allo stack o avere altri ruoli speciali. RISC-V appartiene a quest'ultima classe.
 DA COMPRENDERE OGGI: accumulatore, pila, registri.
 Per il docente: Modello a registri generici, ad accumulatore, a stack; architetture ortogonali. La definizione originale di ortogonale cita anche un registro di stato; RISC-V è ortogonale e non ha nemmeno quello.</a:t>
             </a:r>
@@ -1025,7 +1025,7 @@
           <a:p>
             <a:r>
               <a:rPr lang="en-US" dirty="0"/>
-              <a:t>RISC-V è un processore load-store a registri generici. Solo load e store toccano la memoria; ogni altra istruzione lavora da registro a registro, che è più veloce. Le istruzioni hanno tre operandi, due sorgenti e una destinazione, così nessun valore viene distrutto se non lo si vuole. Ogni istruzione fa una cosa semplice e ha dimensione fissa, il che la rende facile da decodificare e da eseguire in pipeline. È questo il significato di RISC. Le sette righe del riscaldamento sono il prezzo, e la semplicità di ogni riga è il guadagno.
+              <a:t>RISC-V è un processore load-store a registri generali. Solo i caricamenti e le memorizzazioni accedono alla memoria; ogni altra istruzione opera da registro a registro, il che è più veloce. Le istruzioni hanno tre operandi, due sorgenti e una destinazione, così che nessun valore venga distrutto se non lo sceglie il programmatore. Ogni istruzione esegue un'operazione semplice e ha dimensione fissa, il che la rende facile da decodificare e da eseguire in una pipeline. È questo il significato di RISC. Le sette righe del riscaldamento sono il prezzo del progetto, e la semplicità di ciascuna riga è il suo guadagno.
 DA COMPRENDERE OGGI: accumulatore, pila, registri.
 Per il docente: Da registro a registro: [REGX] + [REGY] dà [REGZ]. Le forme da memoria a registro e da registro a memoria della presentazione originale esistono nei processori CISC e sono esattamente ciò a cui RISC rinuncia.</a:t>
             </a:r>
@@ -1115,7 +1115,7 @@
           <a:p>
             <a:r>
               <a:rPr lang="en-US" dirty="0"/>
-              <a:t>Lo schema a blocchi di un processore RV32, da sinistra a destra. Il PC dà l'indirizzo dell'istruzione. L'istruzione viene prelevata dalla memoria. Il decodificatore ne separa i campi e l'unità di controllo emette i comandi. Il banco dei registri fornisce gli operandi. La ALU calcola, oppure forma un indirizzo. La memoria dati viene letta o scritta da load e store. Due percorsi tornano indietro: il risultato torna nel registro indicato da rd, e il prossimo valore del PC è PC più 4 oppure la destinazione di un salto. Ogni istruzione che scrivete percorre questa strada.
+              <a:t>Lo schema a blocchi di un processore RV32, letto da sinistra a destra. Il PC fornisce l'indirizzo dell'istruzione, che viene prelevata dalla memoria. Il decodificatore ne separa i campi e l'unità di controllo emette i segnali corrispondenti. Il banco dei registri fornisce gli operandi. La ALU calcola un risultato o forma un indirizzo. La memoria dati viene letta o scritta da caricamenti e memorizzazioni. Due percorsi tornano indietro: il risultato torna al registro nominato da rd, e il PC successivo è PC + 4 oppure la destinazione del salto. Ogni istruzione scritta nel corso percorre questa strada, e le macchine delle Lezioni 11, 13 e 14 si possono tutte collocare su di essa.
 DA COMPRENDERE OGGI: il processore RV32.
 Per il docente: Il classico datapath RISC-V a ciclo singolo di Patterson e Hennessy, ridotto ai suoi blocchi; memoria istruzioni e memoria dati sono lo stesso spazio di indirizzi, disegnato due volte per chiarezza. Sostituisce la slide «Architettura del processore MC68000».</a:t>
             </a:r>
@@ -1205,7 +1205,7 @@
           <a:p>
             <a:r>
               <a:rPr lang="en-US" dirty="0"/>
-              <a:t>Il processore del kit, in numeri: insieme di istruzioni RV32IMAC; un core principale fino a 160 MHz con pipeline a quattro stadi, e un secondo core a basso consumo; modi macchina e utente; nessuna virgola mobile; 512 KB di SRAM, 320 KB di ROM e una flash esterna; radio e periferiche sullo stesso chip. Un calcolatore completo in pochi millimetri quadrati, per circa due euro: processore, memoria e ingresso/uscita ci sono tutti, come nel modello.
+              <a:t>Il processore del kit, in cifre: insieme di istruzioni RV32IMAC; un core principale fino a 160 MHz con una pipeline a quattro stadi, e un secondo core a basso consumo; modi macchina e utente; nessuna virgola mobile; 512 KB di SRAM, 320 KB di ROM e una flash esterna; radio e periferiche sullo stesso chip. Un calcolatore completo in pochi millimetri quadrati, al costo di circa due euro, in cui processore, memoria e ingresso/uscita sono tutti presenti esattamente come nel modello.
 DA COMPRENDERE OGGI: il processore RV32.
 Per il docente: Dal datasheet Espressif dell'ESP32-C6. Un calcolatore completo su un chip di pochi millimetri quadrati che costa circa due euro: processore, memoria e ingresso/uscita ci sono tutti, come nel modello delle prime slide.</a:t>
             </a:r>
@@ -1295,8 +1295,8 @@
           <a:p>
             <a:r>
               <a:rPr lang="en-US" dirty="0"/>
-              <a:t>Tornate alla tabella che affianca il modello a RISC-V e cercate le righe con «assente». Una di esse è tra le opzioni.
-Ricordate il riscaldamento: quali istruzioni toccavano la memoria, e quali solo i registri? È la definizione di architettura load-store.
+              <a:t>Per la prima domanda si torna alla tabella che affianca il modello a RISC-V e si cercano le righe marcate "assente"; una di esse è tra le opzioni.
+Per la seconda si ricorda il riscaldamento: quali istruzioni accedevano alla memoria, e quali solo ai registri? La risposta è la definizione di un'architettura load-store.
 Per il docente: 1. Risposta: B. RISC-V non ha codici di condizione: i salti confrontano direttamente i registri.
 2. Risposta: C. È un'architettura load-store: lw, lh, lb, sw, sh, sb e le forme senza segno.</a:t>
             </a:r>
@@ -1386,8 +1386,8 @@
           <a:p>
             <a:r>
               <a:rPr lang="en-US" dirty="0"/>
-              <a:t>Seguite le due istruzioni: il puntatore scende di una parola, poi un valore viene memorizzato all'indirizzo che ora contiene. Un valore è stato aggiunto in cima allo stack.
-In una macchina ad accumulatore l'accumulatore è l'operando implicito: è uno dei due addendi e riceve il risultato. L'operando scritto nell'istruzione viene soltanto letto.
+              <a:t>Per la prima domanda si seguono le due istruzioni una dopo l'altra: il puntatore scende di una parola, e poi un valore viene memorizzato all'indirizzo che ora contiene. Un valore è stato posto sullo stack.
+Per la seconda: in una macchina ad accumulatore l'accumulatore è l'operando implicito, fa da uno dei due addendi e riceve il risultato, mentre l'operando scritto nell'istruzione viene solo letto.
 Per il docente: 1. Risposta: B. Il puntatore scende di una parola e il valore è memorizzato sulla nuova cima: un push.
 2. Risposta: B. L'accumulatore è l'operando implicito e la destinazione.</a:t>
             </a:r>
@@ -1477,7 +1477,7 @@
           <a:p>
             <a:r>
               <a:rPr lang="en-US" dirty="0"/>
-              <a:t>Dieci termini. Control unit è l'unità di controllo. Un machine register, registro di macchina, è un registro visibile al programmatore. I flag si dicono anche indicatori. Supervisor e user state, stato supervisore e stato utente, sono i due livelli di privilegio. Una privileged instruction, istruzione privilegiata, si può eseguire solo in stato supervisore.</a:t>
+              <a:t>Dieci termini. La control unit è l'unità di controllo. Un registro di macchina è uno visibile al programmatore. I flag si chiamano in italiano anche indicatori. Lo stato supervisore e lo stato utente sono i due livelli di privilegio. Un'istruzione privilegiata si può eseguire solo nello stato supervisore.</a:t>
             </a:r>
             <a:endParaRPr lang="en-US" dirty="0"/>
           </a:p>
@@ -1565,7 +1565,7 @@
           <a:p>
             <a:r>
               <a:rPr lang="en-US" dirty="0"/>
-              <a:t>Sei obiettivi. Nominare i componenti di un processore. Distinguere i registri interni dai registri di macchina, e i registri generici da quelli speciali. Spiegare come funziona uno stack e come RISC-V realizza push e pop. Confrontare sullo stesso calcolo tre modelli di processore: accumulatore, stack e registri generici. Descrivere RISC-V come processore load-store a registri generici e leggere il nome RV32IMAC. E riportare ogni elemento del modello sul processore del kit.</a:t>
+              <a:t>Sei risultati di apprendimento. Nominare i componenti di un processore. Distinguere i registri interni dai registri di macchina, e i registri di uso generale da quelli speciali. Spiegare come funziona uno stack e come RISC-V realizza push e pop. Confrontare tre modelli di processore, ad accumulatore, a stack e a registri generali, sullo stesso calcolo. Descrivere RISC-V come architettura load-store a registri generali e leggere il nome RV32IMAC. E far corrispondere ogni elemento del modello al processore del kit.</a:t>
             </a:r>
             <a:endParaRPr lang="en-US" dirty="0"/>
           </a:p>
@@ -1653,7 +1653,7 @@
           <a:p>
             <a:r>
               <a:rPr lang="en-US" dirty="0"/>
-              <a:t>Cinque conclusioni. Il processore comanda e controlla, appoggiandosi alla memoria e all'ingresso/uscita. I registri sono locazioni di memoria, dentro o fuori dal processore. I tipi di registri e il loro uso determinano il modello: accumulatore, stack, registri generici. La ALU svolge le operazioni. E RISC-V è un processore load-store a registri generici, senza flag e senza istruzioni di I/O: pochi elementi, ciascuno semplice. La prossima lezione segue un'istruzione per tutta la sua vita.
+              <a:t>Cinque conclusioni. Il processore comanda e controlla, appoggiandosi alla memoria e all'ingresso/uscita. I registri sono locazioni di memorizzazione, interne o visibili al programmatore. I tipi di registri e il loro uso determinano il modello di processore: ad accumulatore, a stack o a registri generali. La ALU esegue le operazioni. E RISC-V è un processore load-store a registri generali, senza flag e senza istruzioni di I/O: pochi elementi, ciascuno semplice. La prossima lezione segue un'istruzione per l'intera sua vita.
 Stato di apprendimento, riepilogo. DA COMPRENDERE OGGI: accumulatore, pila, registri; il modello del processore; i registri di RISC-V; la convenzione di chiamata; la pila; il processore RV32. DA UTILIZZARE OGGI: il programma completo, gli strumenti di PRG32 (si usa, non si studia, in questo corso). DA COMPRENDERE PIÙ AVANTI: interruzioni e trap (Lezione 19). Una slide senza etichetta è contesto: una storia, un esempio, una domanda, un esercizio.
 Per il docente: Prossima lezione: istruzioni e interruzioni.</a:t>
             </a:r>
@@ -1743,7 +1743,7 @@
           <a:p>
             <a:r>
               <a:rPr lang="en-US" dirty="0"/>
-              <a:t>Un richiamo e una definizione. Un calcolatore ha tre sottosistemi, processore, memoria centrale e ingresso/uscita, collegati da bus. Il processore può eseguire soltanto un insieme fisso di istruzioni, da poche decine a poche centinaia, e il linguaggio macchina è l'insieme delle stringhe di bit che le codificano. Le istruzioni richiedono due tipi di cose: trasferimenti di informazione e operazioni aritmetiche o logiche. Programmi e dati stanno entrambi nella memoria centrale.
+              <a:t>Un richiamo e una definizione. Un calcolatore comprende tre sottosistemi, processore, memoria centrale e ingresso/uscita, collegati da bus. Il processore può eseguire solo un insieme fisso di istruzioni, da qualche decina a qualche centinaio, e il linguaggio macchina è l'insieme delle stringhe di bit che le codificano. Le istruzioni richiedono due tipi di azione: trasferimenti di informazione, e operazioni aritmetiche o logiche. Programmi e dati risiedono entrambi nella memoria centrale, come prescrive il modello di von Neumann della Lezione 03.
 DA COMPRENDERE OGGI: il modello del processore.
 Per il docente: RV32I, la base di RISC-V, ha circa quaranta istruzioni; con le estensioni M, A e C del kit, circa cento codifiche. Il Motorola 68000 aveva cinquantasei tipi di istruzione con molte varianti ciascuno.</a:t>
             </a:r>
@@ -1833,7 +1833,7 @@
           <a:p>
             <a:r>
               <a:rPr lang="en-US" dirty="0"/>
-              <a:t>Il modello di riferimento. L'unità di controllo contiene il program counter, con l'indirizzo della prossima istruzione, un registro di decodifica, con l'istruzione in esecuzione, e la rete che emette i comandi. I registri di macchina da R0 a Rn-1 sono quelli che usa il programmatore. L'unità aritmetico-logica ha due registri operando e un registro risultato. Due coppie di registri collegano il processore all'esterno: MA e MB verso la memoria, RI e RU verso ingresso e uscita. Un bus interno collega tutto.
+              <a:t>Il modello di riferimento. L'unità di controllo contiene il program counter, che tiene l'indirizzo della prossima istruzione; un registro di decodifica, che tiene l'istruzione in esecuzione; e la rete che emette i segnali di controllo. I registri di macchina da R0 a Rn-1 sono quelli usati dal programmatore. L'unità aritmetico-logica ha due registri operando e un registro risultato. Due coppie di registri collegano il processore al mondo esterno: MA e MB verso la memoria, RI e RU verso ingresso e uscita. Un bus interno li collega tutti, alla maniera del bus comune della Lezione 14.
 DA COMPRENDERE OGGI: il modello del processore.
 Per il docente: Modello di riferimento. Pur basati sullo stesso schema logico, e quindi fatti di componenti abbastanza simili, i processori in commercio possono essere molto diversi tra loro.</a:t>
             </a:r>
@@ -1923,7 +1923,7 @@
           <a:p>
             <a:r>
               <a:rPr lang="en-US" dirty="0"/>
-              <a:t>Ogni elemento del modello, e che cos'è in RISC-V. Il program counter è pc. I registri di macchina sono da x0 a x31, con i nomi che conoscete. I registri della ALU e quelli verso la memoria esistono nell'hardware ma sono invisibili al programmatore. Due righe dicono «assente», e sono scelte volute: non ci sono registri per ingresso e uscita, perché i dispositivi sono mappati in memoria, e non c'è un registro di stato con i flag. I registri speciali sono i CSR, riservati al software privilegiato.
+              <a:t>Ogni elemento del modello, e la sua controparte in RISC-V. Il program counter è pc. I registri di macchina sono da x0 a x31, con i loro nomi familiari. I registri della ALU e quelli dell'interfaccia di memoria esistono nell'hardware ma sono invisibili al programmatore. Due righe dicono "assente", ed entrambe sono scelte di progetto deliberate: non ci sono registri per ingresso e uscita, perché i dispositivi sono mappati in memoria, e non c'è un registro di stato con i flag. I registri speciali sono i CSR, riservati al software privilegiato e trattati nella Lezione 19.
 DA COMPRENDERE OGGI: il modello del processore.
 Per il docente: Le due righe «assente» sono semplificazioni volute di RISC-V, spiegate più avanti in questa lezione e nella Lezione 15. L'MC68000 della presentazione originale aveva tutti gli elementi del modello: otto registri dati e otto registri indirizzi, un registro di stato con i codici di condizione, e una circuiteria separata per le interruzioni.</a:t>
             </a:r>
@@ -2013,7 +2013,7 @@
           <a:p>
             <a:r>
               <a:rPr lang="en-US" dirty="0"/>
-              <a:t>Due classi di registri. I registri interni sono necessari al funzionamento del processore ma non sono visibili al programmatore: il program counter, i registri verso la memoria, quelli della ALU. I registri di macchina definiscono il modello di programmazione: sono quelli nominati nelle istruzioni. Il processore tratta tre tipi di informazione, istruzioni, indirizzi e dati, e ciascuno potrebbe avere una dimensione propria. In RV32 tutti e tre sono larghi 32 bit, e questo rende la macchina molto regolare.
+              <a:t>Due classi di registri. I registri interni sono necessari al funzionamento del processore ma invisibili al programmatore: il program counter, i registri dell'interfaccia di memoria, quelli della ALU. I registri di macchina definiscono il modello di programmazione, essendo quelli nominati nelle istruzioni. Il processore tratta tre tipi di informazione, istruzioni, indirizzi e dati, ciascuno dei quali potrebbe in linea di principio avere la sua larghezza. In RV32 tutti e tre sono larghi 32 bit, il che conferisce alla macchina una spiccata regolarità.
 DA COMPRENDERE OGGI: il modello del processore.
 Per il docente: Tipi di dato del processore. Il «32» di RV32 è la larghezza dei registri; RV64 ha registri e indirizzi a 64 bit e le stesse istruzioni a 32 bit.</a:t>
             </a:r>
@@ -2103,7 +2103,7 @@
           <a:p>
             <a:r>
               <a:rPr lang="en-US" dirty="0"/>
-              <a:t>Un processore ha almeno due stati di funzionamento. In stato supervisore esegue il sistema operativo e può eseguire ogni istruzione. In stato utente esegue un programma qualunque e può eseguire tutto tranne le istruzioni privilegiate, quelle che potrebbero compromettere il sistema. RISC-V li chiama modi: il modo macchina, il più privilegiato e l'unico obbligatorio, il modo supervisore e il modo utente. Il chip del kit ha macchina e utente. Il passaggio dall'uno all'altro avviene attraverso le trap della prossima lezione.
+              <a:t>Un processore ha almeno due stati di funzionamento. Nello stato supervisore esegue il sistema operativo e può eseguire ogni istruzione. Nello stato utente esegue un programma ordinario e può eseguire tutto tranne le istruzioni privilegiate, quelle il cui uso improprio potrebbe compromettere il sistema. RISC-V chiama questi stati modi: il modo macchina, il più privilegiato e l'unico obbligatorio, il modo supervisore e il modo utente. Il chip del kit implementa i modi macchina e utente. Il passaggio dall'uno all'altro avviene attraverso le trap della prossima lezione.
 DA COMPRENDERE OGGI: il modello del processore. DA COMPRENDERE PIÙ AVANTI: interruzioni e trap (si studia nella Lezione 19).
 Per il docente: Stato utente o stato supervisore. RISC-V definisce tre modi di privilegio: M, il più privilegiato e l'unico obbligatorio, esegue il firmware; S esegue il kernel di un sistema operativo come Linux; U esegue le applicazioni. L'ESP32-C6 realizza M e U. Il cambio di modo avviene attraverso le trap (Lezione 19).</a:t>
             </a:r>
@@ -2193,7 +2193,7 @@
           <a:p>
             <a:r>
               <a:rPr lang="en-US" dirty="0"/>
-              <a:t>Cinque funzioni dei registri. Transito: portare i dati tra memoria e registri. Accumulo: contenere operandi e risultati dell'aritmetica. Indirizzamento: contenere un indirizzo o una sua parte, come fanno i registri base e indice. Puntatore allo stack: indicare la cima di uno stack in memoria. Flag: singoli bit che registrano eventi come zero, segno, overflow e riporto, per condizionare le istruzioni successive. In RISC-V i registri generici svolgono le prime quattro funzioni; la quinta non esiste come registro.
+              <a:t>Cinque funzioni dei registri. Transito: portare dati tra memoria e registri. Accumulazione: contenere operandi e risultati dell'aritmetica. Indirizzamento: contenere un indirizzo o parte di esso, come fanno i registri base e indice. Puntatore allo stack: indicare la cima di uno stack in memoria. Flag: singoli bit che registrano eventi come zero, segno, overflow e riporto, che condizionano le istruzioni successive. In RISC-V i registri generali svolgono le prime quattro funzioni; la quinta non esiste affatto come registro.
 DA COMPRENDERE OGGI: i registri di RISC-V.
 Per il docente: Funzione dei registri. In RISC-V le prime quattro funzioni sono svolte tutte dai registri generici; la quinta non esiste come registro.</a:t>
             </a:r>
@@ -2283,7 +2283,7 @@
           <a:p>
             <a:r>
               <a:rPr lang="en-US" dirty="0"/>
-              <a:t>La tabella completa dei registri di RISC-V, con numeri, nomi e ruoli. Ne avete usati la maggior parte: zero, ra, sp, i temporanei da t0 a t6, gli argomenti da a0 ad a7, i registri salvati da s0 a s11. Due sono nuovi: gp e tp, usati da compilatori e sistemi operativi. L'hardware tratta allo stesso modo i registri da x1 a x31; solo x0 è speciale. I ruoli vengono dalla convenzione di chiamata. Il program counter non sta nel banco.
+              <a:t>La tabella completa dei registri RISC-V, con numeri, nomi e ruoli. La maggior parte è in uso da settimane: zero, ra, sp, i temporanei da t0 a t6, gli argomenti da a0 ad a7, i registri salvati da s0 a s11; gp e tp sono nuovi, usati da compilatori e sistemi operativi. L'hardware tratta in modo identico i registri da x1 a x31 e solo x0 è speciale; i ruoli derivano dalla convenzione di chiamata, incontrata nella Lezione 02 e qui enunciata come regola. Una chiamata può sovrascrivere ra e i registri t e a, che sono salvati dal chiamante: un chiamante che ne ha ancora bisogno li salva prima della chiamata. Una chiamata deve restituire invariati i registri s e sp, che sono salvati dal chiamato: una funzione che ne usa uno lo salva nel suo frame e lo ripristina prima di ret. Il program counter non fa parte del banco dei registri.
 DA COMPRENDERE OGGI: i registri di RISC-V; la convenzione di chiamata.
 Per il docente: L'hardware tratta allo stesso modo i registri da x1 a x31; solo x0 è speciale. I ruoli vengono dalla convenzione di chiamata, incontrata nella Lezione 02 e qui enunciata come regola: una chiamata può distruggere ra e i registri t e a (salvati dal chiamante: salvateli prima della chiamata se vi servono ancora); deve restituire invariati i registri s e sp (salvati dal chiamato: una funzione che li usa li salva nel suo frame e li ripristina prima di ret). L'MC68000 separava invece i registri dati D0-D7 dai registri indirizzi A0-A7, con A7 come puntatore allo stack.</a:t>
             </a:r>
@@ -3363,7 +3363,7 @@
                 <a:ea typeface="Calibri" pitchFamily="34" charset="-122"/>
                 <a:cs typeface="Calibri" pitchFamily="34" charset="-120"/>
               </a:rPr>
-              <a:t>18-Architettura_dei_Calcolatori-Processore-Codice.pptx</a:t>
+              <a:t>18-Architettura_dei_Calcolatori-Processore-Lab.pptx</a:t>
             </a:r>
             <a:endParaRPr lang="en-US" sz="1300" dirty="0"/>
           </a:p>

--- a/it/slides/18-Architettura_dei_Calcolatori-Processore.pptx
+++ b/it/slides/18-Architettura_dei_Calcolatori-Processore.pptx
@@ -126,13 +126,13 @@
   <p:extLst>
     <p:ext uri="{521415D9-36F7-43E2-AB2F-B90AF26B5E84}">
       <p14:sectionLst xmlns:p14="http://schemas.microsoft.com/office/powerpoint/2010/main">
-        <p14:section name="Apertura" id="{446a6482-b0f8-9a8e-751d-66f61429587f}">
+        <p14:section name="Apertura" id="{fd737e44-a3cd-4ff6-c53f-455fdbd26fcb}">
           <p14:sldIdLst>
             <p14:sldId id="256"/>
             <p14:sldId id="257"/>
           </p14:sldIdLst>
         </p14:section>
-        <p14:section name="Il processore" id="{6b900852-fbb3-5276-3b76-1052d82b2c32}">
+        <p14:section name="Il processore" id="{a396393b-e45b-5a4c-a6bb-e1fa45cb88cc}">
           <p14:sldIdLst>
             <p14:sldId id="258"/>
             <p14:sldId id="259"/>
@@ -141,7 +141,7 @@
             <p14:sldId id="262"/>
           </p14:sldIdLst>
         </p14:section>
-        <p14:section name="I registri" id="{493db1d5-400e-c567-bf04-63853a142700}">
+        <p14:section name="I registri" id="{b0a635d1-d79b-8193-0733-49e125567c74}">
           <p14:sldIdLst>
             <p14:sldId id="263"/>
             <p14:sldId id="264"/>
@@ -149,18 +149,18 @@
             <p14:sldId id="266"/>
           </p14:sldIdLst>
         </p14:section>
-        <p14:section name="Lo stack" id="{40c4a898-9a1c-52e4-1d34-0831b475cc05}">
+        <p14:section name="Lo stack" id="{f166b583-24cc-7325-8139-dc3e031a9dd6}">
           <p14:sldIdLst>
             <p14:sldId id="267"/>
           </p14:sldIdLst>
         </p14:section>
-        <p14:section name="Modelli di processore" id="{9a76535b-01d8-23e8-ed53-9ccfb7f85e31}">
+        <p14:section name="Modelli di processore" id="{e54c5ee5-6b94-efd4-0657-f8e5900ec8eb}">
           <p14:sldIdLst>
             <p14:sldId id="268"/>
             <p14:sldId id="269"/>
           </p14:sldIdLst>
         </p14:section>
-        <p14:section name="La ALU e il quadro d'insieme" id="{e384407f-8346-6c24-b091-baaca81b0bd2}">
+        <p14:section name="La ALU e il quadro d'insieme" id="{2ea95acd-410a-c74e-69e3-db8e322f3094}">
           <p14:sldIdLst>
             <p14:sldId id="270"/>
             <p14:sldId id="271"/>
@@ -665,7 +665,7 @@
           <a:p>
             <a:r>
               <a:rPr lang="en-US" dirty="0"/>
-              <a:t>Molti processori hanno un registro di stato i cui bit, i flag, registrano l'esito dell'ultima operazione: zero, negativo, overflow, riporto. Un'istruzione li imposta e un successivo salto condizionato li verifica. RISC-V non ne ha. Un salto confronta due registri e salta, in una sola istruzione; slt scrive il risultato di un confronto in un registro ordinario; riporto e overflow si calcolano quando servono, come nella Lezione 05. Meno stato nascosto significa un processore più semplice, una pipeline più semplice e una gestione delle interruzioni più semplice, perché non c'è stato implicito da salvare.
+              <a:t>Molti processori hanno un registro di stato i cui bit, i flag, registrano l'esito dell'ultima operazione: zero, negativo, overflow, riporto. Un'istruzione li imposta e un successivo salto condizionato li verifica. RISC-V non ne ha. Un salto confronta due registri e salta, in una sola istruzione; slt scrive il risultato di un confronto in un registro ordinario; riporto e overflow si calcolano quando servono, come nella Lezione 05. Meno stato nascosto significa un processore più semplice, una pipeline più semplice (la sovrapposizione delle fasi di istruzioni successive, come in una catena di montaggio) e una gestione delle interruzioni più semplice, perché non c'è stato implicito da salvare.
 DA COMPRENDERE OGGI: i registri di RISC-V.
 Per il docente: Registro di stato. La presentazione originale elencava Z, N, P (positivo), V, C e un bit di parità.</a:t>
             </a:r>

--- a/it/slides/18-Architettura_dei_Calcolatori-Processore.pptx
+++ b/it/slides/18-Architettura_dei_Calcolatori-Processore.pptx
@@ -126,13 +126,13 @@
   <p:extLst>
     <p:ext uri="{521415D9-36F7-43E2-AB2F-B90AF26B5E84}">
       <p14:sectionLst xmlns:p14="http://schemas.microsoft.com/office/powerpoint/2010/main">
-        <p14:section name="Apertura" id="{fd737e44-a3cd-4ff6-c53f-455fdbd26fcb}">
+        <p14:section name="Apertura" id="{bf8a22e6-8024-f5ea-d0a1-1f2ff9eb1440}">
           <p14:sldIdLst>
             <p14:sldId id="256"/>
             <p14:sldId id="257"/>
           </p14:sldIdLst>
         </p14:section>
-        <p14:section name="Il processore" id="{a396393b-e45b-5a4c-a6bb-e1fa45cb88cc}">
+        <p14:section name="Il processore" id="{3652d77a-474b-c1d8-7cff-096d3fb5ebbc}">
           <p14:sldIdLst>
             <p14:sldId id="258"/>
             <p14:sldId id="259"/>
@@ -141,7 +141,7 @@
             <p14:sldId id="262"/>
           </p14:sldIdLst>
         </p14:section>
-        <p14:section name="I registri" id="{b0a635d1-d79b-8193-0733-49e125567c74}">
+        <p14:section name="I registri" id="{b7705a54-b507-f5ec-7666-77c977c831e1}">
           <p14:sldIdLst>
             <p14:sldId id="263"/>
             <p14:sldId id="264"/>
@@ -149,18 +149,18 @@
             <p14:sldId id="266"/>
           </p14:sldIdLst>
         </p14:section>
-        <p14:section name="Lo stack" id="{f166b583-24cc-7325-8139-dc3e031a9dd6}">
+        <p14:section name="Lo stack" id="{53b0b667-0a2d-8236-4d99-91e804c916a1}">
           <p14:sldIdLst>
             <p14:sldId id="267"/>
           </p14:sldIdLst>
         </p14:section>
-        <p14:section name="Modelli di processore" id="{e54c5ee5-6b94-efd4-0657-f8e5900ec8eb}">
+        <p14:section name="Modelli di processore" id="{610bb208-d18e-e37d-f247-128b8e028028}">
           <p14:sldIdLst>
             <p14:sldId id="268"/>
             <p14:sldId id="269"/>
           </p14:sldIdLst>
         </p14:section>
-        <p14:section name="La ALU e il quadro d'insieme" id="{2ea95acd-410a-c74e-69e3-db8e322f3094}">
+        <p14:section name="La ALU e il quadro d'insieme" id="{d7e2ce56-1f24-1987-8a69-75b00b660b65}">
           <p14:sldIdLst>
             <p14:sldId id="270"/>
             <p14:sldId id="271"/>
@@ -577,6 +577,7 @@
               <a:t>L'ultimo blocco del corso apre la macchina che ha eseguito ogni programma scritto finora. Questa lezione presenta il processore due volte: prima come modello generale di riferimento, valido per qualsiasi processore, con la sua unità di controllo, i registri, lo stack e l'unità aritmetica; poi come RISC-V, il processore programmato dalle prime settimane. Ogni elemento astratto del modello ha già, per lo studente, un nome familiare, e il metodo della lezione è rendere esplicita quella corrispondenza. L'anello della citazione è il processore stesso: l'unico componente che comanda tutti gli altri.
 Stato di apprendimento: DA COMPRENDERE OGGI, alla fine di questa lezione lo spiegate, lo seguite passo passo e lo applicate da soli; DA UTILIZZARE OGGI, oggi seguite e usate la ricetta; come funziona dentro si spiega più avanti, o non fa parte del corso; DA COMPRENDERE PIÙ AVANTI, riconoscete il nome e lo scopo; lo spiega una lezione successiva. Una slide senza etichetta è contesto: una storia, un esempio, una domanda, un esercizio.
 Stato di apprendimento di questa lezione. DA COMPRENDERE OGGI: accumulatore, pila, registri; il modello del processore; i registri di RISC-V; la convenzione di chiamata; la pila; il processore RV32. DA UTILIZZARE OGGI: il programma completo, gli strumenti di PRG32 (si usa, non si studia, in questo corso). DA COMPRENDERE PIÙ AVANTI: interruzioni e trap (Lezione 19). Una slide senza etichetta è contesto: una storia, un esempio, una domanda, un esercizio.
+Percorso. I risultati di oggi: (1) seguire un'istruzione attraverso i blocchi di un processore RV32; (2) usare correttamente lo stack e la convenzione di chiamata; (3) confrontare macchine ad accumulatore, a stack e a registri. Si appoggia su: solo ciò che ha preparato la Lezione 01. Prossimo passo: Lezione 19, Istruzioni e interruzioni.
 Per il docente: La presentazione originale esponeva un modello generale di processore e finiva con l'architettura del Motorola MC68000. Qui il modello generale resta e il riferimento è RISC-V (RV32IMAC, come sull'ESP32-C6 del kit PRG32): gli studenti lo programmano dai primi giorni, quindi ogni elemento astratto ha un nome che conoscono già.</a:t>
             </a:r>
             <a:endParaRPr lang="en-US" dirty="0"/>
@@ -1654,7 +1655,7 @@
             <a:r>
               <a:rPr lang="en-US" dirty="0"/>
               <a:t>Cinque conclusioni. Il processore comanda e controlla, appoggiandosi alla memoria e all'ingresso/uscita. I registri sono locazioni di memorizzazione, interne o visibili al programmatore. I tipi di registri e il loro uso determinano il modello di processore: ad accumulatore, a stack o a registri generali. La ALU esegue le operazioni. E RISC-V è un processore load-store a registri generali, senza flag e senza istruzioni di I/O: pochi elementi, ciascuno semplice. La prossima lezione segue un'istruzione per l'intera sua vita.
-Stato di apprendimento, riepilogo. DA COMPRENDERE OGGI: accumulatore, pila, registri; il modello del processore; i registri di RISC-V; la convenzione di chiamata; la pila; il processore RV32. DA UTILIZZARE OGGI: il programma completo, gli strumenti di PRG32 (si usa, non si studia, in questo corso). DA COMPRENDERE PIÙ AVANTI: interruzioni e trap (Lezione 19). Una slide senza etichetta è contesto: una storia, un esempio, una domanda, un esercizio.
+Stato di apprendimento, riepilogo. DA COMPRENDERE OGGI: accumulatore, pila, registri; il modello del processore; i registri di RISC-V; la convenzione di chiamata; la pila; il processore RV32. DA UTILIZZARE OGGI: il programma completo, gli strumenti di PRG32 (si usa, non si studia, in questo corso). DA COMPRENDERE PIÙ AVANTI: interruzioni e trap (Lezione 19). Una slide senza etichetta è contesto: una storia, un esempio, una domanda, un esercizio. Il filo della lezione: Il ra salvato nella Lezione 02 è ora spiegato: lo stack e la convenzione di chiamata sono regole che permettono a funzioni scritte da persone diverse di chiamarsi. Prossimo passo: come un'istruzione è codificata ed eseguita, e come il processore viene interrotto. Biglietto d'uscita (da due a quattro minuti, da soli, su carta): 1. Seguite add t2, t0, t1 nello schema a blocchi di un processore RV32: nominate, in ordine, i blocchi che usa e che cosa fa ciascuno. Quale blocco non usa? 2. Una funzione comincia con addi sp, sp, -16 e sw ra, 12(sp). Dove si trova ora ra, e che cosa deve fare la funzione prima di ret?
 Per il docente: Prossima lezione: istruzioni e interruzioni.</a:t>
             </a:r>
             <a:endParaRPr lang="en-US" dirty="0"/>
